--- a/slides/template/tutorial_template.pptx
+++ b/slides/template/tutorial_template.pptx
@@ -2,17 +2,17 @@
 <file path=ppt/presentation.xml><?xml version="1.0" encoding="utf-8"?>
 <p:presentation xmlns:a="http://schemas.openxmlformats.org/drawingml/2006/main" xmlns:r="http://schemas.openxmlformats.org/officeDocument/2006/relationships" xmlns:p="http://schemas.openxmlformats.org/presentationml/2006/main" saveSubsetFonts="1" autoCompressPictures="0">
   <p:sldMasterIdLst>
-    <p:sldMasterId id="2147483648" r:id="rId1"/>
+    <p:sldMasterId id="2147483650" r:id="rId1"/>
   </p:sldMasterIdLst>
+  <p:notesMasterIdLst>
+    <p:notesMasterId r:id="rId5"/>
+  </p:notesMasterIdLst>
   <p:sldIdLst>
     <p:sldId id="256" r:id="rId2"/>
     <p:sldId id="257" r:id="rId3"/>
-    <p:sldId id="258" r:id="rId4"/>
+    <p:sldId id="261" r:id="rId4"/>
   </p:sldIdLst>
-  <p:notesMasterIdLst>
-    <p:notesMasterId r:id="rId5"/>
-  </p:notesMasterIdLst>
-  <p:sldSz cx="9144000" cy="5143500"/>
+  <p:sldSz cx="9144000" cy="5143500" type="screen16x9"/>
   <p:notesSz cx="5143500" cy="9144000"/>
   <p:defaultTextStyle>
     <a:lvl1pPr marL="0" algn="l" defTabSz="914400" rtl="0" eaLnBrk="1" latinLnBrk="0" hangingPunct="1">
@@ -106,6 +106,11 @@
       </a:defRPr>
     </a:lvl9pPr>
   </p:defaultTextStyle>
+  <p:extLst>
+    <p:ext uri="{EFAFB233-063F-42B5-8137-9DF3F51BA10A}">
+      <p15:sldGuideLst xmlns:p15="http://schemas.microsoft.com/office/powerpoint/2012/main"/>
+    </p:ext>
+  </p:extLst>
 </p:presentation>
 </file>
 
@@ -131,234 +136,10 @@
           <a:chExt cx="0" cy="0"/>
         </a:xfrm>
       </p:grpSpPr>
-      <p:sp>
-        <p:nvSpPr>
-          <p:cNvPr id="2" name="Header Placeholder 1"/>
-          <p:cNvSpPr>
-            <a:spLocks noGrp="1"/>
-          </p:cNvSpPr>
-          <p:nvPr>
-            <p:ph type="hdr" sz="quarter"/>
-          </p:nvPr>
-        </p:nvSpPr>
-        <p:spPr>
-          <a:xfrm>
-            <a:off x="0" y="0"/>
-            <a:ext cx="2971800" cy="458788"/>
-          </a:xfrm>
-          <a:prstGeom prst="rect">
-            <a:avLst/>
-          </a:prstGeom>
-        </p:spPr>
-        <p:txBody>
-          <a:bodyPr vert="horz" lIns="91440" tIns="45720" rIns="91440" bIns="45720" rtlCol="0"/>
-          <a:lstStyle>
-            <a:lvl1pPr algn="l">
-              <a:defRPr sz="1200"/>
-            </a:lvl1pPr>
-          </a:lstStyle>
-          <a:p>
-            <a:endParaRPr lang="en-US"/>
-          </a:p>
-        </p:txBody>
-      </p:sp>
-      <p:sp>
-        <p:nvSpPr>
-          <p:cNvPr id="3" name="Date Placeholder 2"/>
-          <p:cNvSpPr>
-            <a:spLocks noGrp="1"/>
-          </p:cNvSpPr>
-          <p:nvPr>
-            <p:ph type="dt" idx="1"/>
-          </p:nvPr>
-        </p:nvSpPr>
-        <p:spPr>
-          <a:xfrm>
-            <a:off x="3884613" y="0"/>
-            <a:ext cx="2971800" cy="458788"/>
-          </a:xfrm>
-          <a:prstGeom prst="rect">
-            <a:avLst/>
-          </a:prstGeom>
-        </p:spPr>
-        <p:txBody>
-          <a:bodyPr vert="horz" lIns="91440" tIns="45720" rIns="91440" bIns="45720" rtlCol="0"/>
-          <a:lstStyle>
-            <a:lvl1pPr algn="r">
-              <a:defRPr sz="1200"/>
-            </a:lvl1pPr>
-          </a:lstStyle>
-          <a:p>
-            <a:fld id="{5282F153-3F37-0F45-9E97-73ACFA13230C}" type="datetimeFigureOut">
-              <a:rPr lang="en-US"/>
-              <a:t>7/23/19</a:t>
-            </a:fld>
-            <a:endParaRPr lang="en-US"/>
-          </a:p>
-        </p:txBody>
-      </p:sp>
-      <p:sp>
-        <p:nvSpPr>
-          <p:cNvPr id="4" name="Slide Image Placeholder 3"/>
-          <p:cNvSpPr>
-            <a:spLocks noGrp="1" noRot="1" noChangeAspect="1"/>
-          </p:cNvSpPr>
-          <p:nvPr>
-            <p:ph type="sldImg" idx="2"/>
-          </p:nvPr>
-        </p:nvSpPr>
-        <p:spPr>
-          <a:xfrm>
-            <a:off x="685800" y="1143000"/>
-            <a:ext cx="5486400" cy="3086100"/>
-          </a:xfrm>
-          <a:prstGeom prst="rect">
-            <a:avLst/>
-          </a:prstGeom>
-          <a:noFill/>
-          <a:ln w="12700">
-            <a:solidFill>
-              <a:prstClr val="black"/>
-            </a:solidFill>
-          </a:ln>
-        </p:spPr>
-        <p:txBody>
-          <a:bodyPr vert="horz" lIns="91440" tIns="45720" rIns="91440" bIns="45720" rtlCol="0" anchor="ctr"/>
-          <a:lstStyle/>
-          <a:p>
-            <a:endParaRPr lang="en-US"/>
-          </a:p>
-        </p:txBody>
-      </p:sp>
-      <p:sp>
-        <p:nvSpPr>
-          <p:cNvPr id="5" name="Notes Placeholder 4"/>
-          <p:cNvSpPr>
-            <a:spLocks noGrp="1"/>
-          </p:cNvSpPr>
-          <p:nvPr>
-            <p:ph type="body" sz="quarter" idx="3"/>
-          </p:nvPr>
-        </p:nvSpPr>
-        <p:spPr>
-          <a:xfrm>
-            <a:off x="685800" y="4400550"/>
-            <a:ext cx="5486400" cy="3600450"/>
-          </a:xfrm>
-          <a:prstGeom prst="rect">
-            <a:avLst/>
-          </a:prstGeom>
-        </p:spPr>
-        <p:txBody>
-          <a:bodyPr vert="horz" lIns="91440" tIns="45720" rIns="91440" bIns="45720" rtlCol="0"/>
-          <a:lstStyle/>
-          <a:p>
-            <a:pPr lvl="0"/>
-            <a:r>
-              <a:rPr lang="en-US"/>
-              <a:t>Click to edit Master text styles</a:t>
-            </a:r>
-          </a:p>
-          <a:p>
-            <a:pPr lvl="1"/>
-            <a:r>
-              <a:rPr lang="en-US"/>
-              <a:t>Second level</a:t>
-            </a:r>
-          </a:p>
-          <a:p>
-            <a:pPr lvl="2"/>
-            <a:r>
-              <a:rPr lang="en-US"/>
-              <a:t>Third level</a:t>
-            </a:r>
-          </a:p>
-          <a:p>
-            <a:pPr lvl="3"/>
-            <a:r>
-              <a:rPr lang="en-US"/>
-              <a:t>Fourth level</a:t>
-            </a:r>
-          </a:p>
-          <a:p>
-            <a:pPr lvl="4"/>
-            <a:r>
-              <a:rPr lang="en-US"/>
-              <a:t>Fifth level</a:t>
-            </a:r>
-          </a:p>
-        </p:txBody>
-      </p:sp>
-      <p:sp>
-        <p:nvSpPr>
-          <p:cNvPr id="6" name="Footer Placeholder 5"/>
-          <p:cNvSpPr>
-            <a:spLocks noGrp="1"/>
-          </p:cNvSpPr>
-          <p:nvPr>
-            <p:ph type="ftr" sz="quarter" idx="4"/>
-          </p:nvPr>
-        </p:nvSpPr>
-        <p:spPr>
-          <a:xfrm>
-            <a:off x="0" y="8685213"/>
-            <a:ext cx="2971800" cy="458787"/>
-          </a:xfrm>
-          <a:prstGeom prst="rect">
-            <a:avLst/>
-          </a:prstGeom>
-        </p:spPr>
-        <p:txBody>
-          <a:bodyPr vert="horz" lIns="91440" tIns="45720" rIns="91440" bIns="45720" rtlCol="0" anchor="b"/>
-          <a:lstStyle>
-            <a:lvl1pPr algn="l">
-              <a:defRPr sz="1200"/>
-            </a:lvl1pPr>
-          </a:lstStyle>
-          <a:p>
-            <a:endParaRPr lang="en-US"/>
-          </a:p>
-        </p:txBody>
-      </p:sp>
-      <p:sp>
-        <p:nvSpPr>
-          <p:cNvPr id="7" name="Slide Number Placeholder 6"/>
-          <p:cNvSpPr>
-            <a:spLocks noGrp="1"/>
-          </p:cNvSpPr>
-          <p:nvPr>
-            <p:ph type="sldNum" sz="quarter" idx="5"/>
-          </p:nvPr>
-        </p:nvSpPr>
-        <p:spPr>
-          <a:xfrm>
-            <a:off x="3884613" y="8685213"/>
-            <a:ext cx="2971800" cy="458787"/>
-          </a:xfrm>
-          <a:prstGeom prst="rect">
-            <a:avLst/>
-          </a:prstGeom>
-        </p:spPr>
-        <p:txBody>
-          <a:bodyPr vert="horz" lIns="91440" tIns="45720" rIns="91440" bIns="45720" rtlCol="0" anchor="b"/>
-          <a:lstStyle>
-            <a:lvl1pPr algn="r">
-              <a:defRPr sz="1200"/>
-            </a:lvl1pPr>
-          </a:lstStyle>
-          <a:p>
-            <a:fld id="{CE5E9CC1-C706-0F49-92D6-E571CC5EEA8F}" type="slidenum">
-              <a:rPr lang="en-US"/>
-              <a:t>‹#›</a:t>
-            </a:fld>
-            <a:endParaRPr lang="en-US"/>
-          </a:p>
-        </p:txBody>
-      </p:sp>
     </p:spTree>
     <p:extLst>
       <p:ext uri="{BB962C8B-B14F-4D97-AF65-F5344CB8AC3E}">
-        <p14:creationId xmlns:p14="http://schemas.microsoft.com/office/powerpoint/2010/main" val="1024086991"/>
+        <p14:creationId xmlns:p14="http://schemas.microsoft.com/office/powerpoint/2010/main" val="3226086712"/>
       </p:ext>
     </p:extLst>
   </p:cSld>
@@ -502,10 +283,6 @@
           <a:bodyPr/>
           <a:lstStyle/>
           <a:p>
-            <a:r>
-              <a:rPr lang="en-US" dirty="0"/>
-              <a:t/>
-            </a:r>
             <a:endParaRPr lang="en-US" dirty="0"/>
           </a:p>
         </p:txBody>
@@ -590,10 +367,6 @@
           <a:bodyPr/>
           <a:lstStyle/>
           <a:p>
-            <a:r>
-              <a:rPr lang="en-US" dirty="0"/>
-              <a:t/>
-            </a:r>
             <a:endParaRPr lang="en-US" dirty="0"/>
           </a:p>
         </p:txBody>
@@ -634,9 +407,9 @@
 </p:notes>
 </file>
 
-<file path=ppt/notesSlides/notesSlide3.xml><?xml version="1.0" encoding="utf-8"?>
-<p:notes xmlns:a="http://schemas.openxmlformats.org/drawingml/2006/main" xmlns:r="http://schemas.openxmlformats.org/officeDocument/2006/relationships" xmlns:p="http://schemas.openxmlformats.org/presentationml/2006/main">
-  <p:cSld>
+<file path=ppt/slideLayouts/slideLayout1.xml><?xml version="1.0" encoding="utf-8"?>
+<p:sldLayout xmlns:a="http://schemas.openxmlformats.org/drawingml/2006/main" xmlns:r="http://schemas.openxmlformats.org/officeDocument/2006/relationships" xmlns:p="http://schemas.openxmlformats.org/presentationml/2006/main" preserve="1" userDrawn="1">
+  <p:cSld name="Rubrik och innehåll">
     <p:spTree>
       <p:nvGrpSpPr>
         <p:cNvPr id="1" name=""/>
@@ -653,24 +426,18 @@
       </p:grpSpPr>
       <p:sp>
         <p:nvSpPr>
-          <p:cNvPr id="2" name="Slide Image Placeholder 1"/>
-          <p:cNvSpPr>
-            <a:spLocks noGrp="1" noRot="1" noChangeAspect="1"/>
-          </p:cNvSpPr>
-          <p:nvPr>
-            <p:ph type="sldImg"/>
-          </p:nvPr>
-        </p:nvSpPr>
-        <p:spPr/>
-      </p:sp>
-      <p:sp>
-        <p:nvSpPr>
-          <p:cNvPr id="3" name="Notes Placeholder 2"/>
+          <p:cNvPr id="5" name="Platshållare för sidfot 4">
+            <a:extLst>
+              <a:ext uri="{FF2B5EF4-FFF2-40B4-BE49-F238E27FC236}">
+                <a16:creationId xmlns:a16="http://schemas.microsoft.com/office/drawing/2014/main" id="{7BC2646F-FC21-01F5-FFF7-E24E84A58397}"/>
+              </a:ext>
+            </a:extLst>
+          </p:cNvPr>
           <p:cNvSpPr>
             <a:spLocks noGrp="1"/>
           </p:cNvSpPr>
           <p:nvPr>
-            <p:ph type="body" idx="1"/>
+            <p:ph type="ftr" sz="quarter" idx="11"/>
           </p:nvPr>
         </p:nvSpPr>
         <p:spPr/>
@@ -678,52 +445,703 @@
           <a:bodyPr/>
           <a:lstStyle/>
           <a:p>
-            <a:r>
-              <a:rPr lang="en-US" dirty="0"/>
-              <a:t/>
-            </a:r>
-            <a:endParaRPr lang="en-US" dirty="0"/>
-          </a:p>
-        </p:txBody>
-      </p:sp>
-      <p:sp>
-        <p:nvSpPr>
-          <p:cNvPr id="4" name="Slide Number Placeholder 3"/>
+            <a:endParaRPr lang="en-SE"/>
+          </a:p>
+        </p:txBody>
+      </p:sp>
+      <p:sp>
+        <p:nvSpPr>
+          <p:cNvPr id="7" name="Platshållare för rubrik 1">
+            <a:extLst>
+              <a:ext uri="{FF2B5EF4-FFF2-40B4-BE49-F238E27FC236}">
+                <a16:creationId xmlns:a16="http://schemas.microsoft.com/office/drawing/2014/main" id="{016BA05B-35C2-AB12-AEC4-0B5AE82CC143}"/>
+              </a:ext>
+            </a:extLst>
+          </p:cNvPr>
           <p:cNvSpPr>
             <a:spLocks noGrp="1"/>
           </p:cNvSpPr>
           <p:nvPr>
-            <p:ph type="sldNum" sz="quarter" idx="10"/>
+            <p:ph type="title"/>
           </p:nvPr>
         </p:nvSpPr>
-        <p:spPr/>
+        <p:spPr>
+          <a:xfrm>
+            <a:off x="286660" y="993423"/>
+            <a:ext cx="8694913" cy="541049"/>
+          </a:xfrm>
+          <a:prstGeom prst="rect">
+            <a:avLst/>
+          </a:prstGeom>
+        </p:spPr>
+        <p:txBody>
+          <a:bodyPr vert="horz" lIns="91440" tIns="45720" rIns="91440" bIns="45720" rtlCol="0" anchor="ctr">
+            <a:noAutofit/>
+          </a:bodyPr>
+          <a:lstStyle/>
+          <a:p>
+            <a:r>
+              <a:rPr lang="sv-SE" dirty="0"/>
+              <a:t>Klicka här för att ändra mall för rubrikformat</a:t>
+            </a:r>
+            <a:endParaRPr lang="en-SE" dirty="0"/>
+          </a:p>
+        </p:txBody>
+      </p:sp>
+      <p:sp>
+        <p:nvSpPr>
+          <p:cNvPr id="8" name="Platshållare för text 2">
+            <a:extLst>
+              <a:ext uri="{FF2B5EF4-FFF2-40B4-BE49-F238E27FC236}">
+                <a16:creationId xmlns:a16="http://schemas.microsoft.com/office/drawing/2014/main" id="{7801BEB2-EFE8-CA19-1392-F614122C48FC}"/>
+              </a:ext>
+            </a:extLst>
+          </p:cNvPr>
+          <p:cNvSpPr>
+            <a:spLocks noGrp="1"/>
+          </p:cNvSpPr>
+          <p:nvPr>
+            <p:ph idx="1"/>
+          </p:nvPr>
+        </p:nvSpPr>
+        <p:spPr>
+          <a:xfrm>
+            <a:off x="286660" y="1665796"/>
+            <a:ext cx="8694913" cy="2996441"/>
+          </a:xfrm>
+          <a:prstGeom prst="rect">
+            <a:avLst/>
+          </a:prstGeom>
+        </p:spPr>
+        <p:txBody>
+          <a:bodyPr vert="horz" lIns="91440" tIns="45720" rIns="91440" bIns="45720" rtlCol="0">
+            <a:noAutofit/>
+          </a:bodyPr>
+          <a:lstStyle/>
+          <a:p>
+            <a:pPr lvl="0"/>
+            <a:r>
+              <a:rPr lang="sv-SE" dirty="0"/>
+              <a:t>Klicka här för att ändra format på bakgrundstexten</a:t>
+            </a:r>
+          </a:p>
+          <a:p>
+            <a:pPr lvl="1"/>
+            <a:r>
+              <a:rPr lang="sv-SE" dirty="0"/>
+              <a:t>Nivå två</a:t>
+            </a:r>
+          </a:p>
+          <a:p>
+            <a:pPr lvl="2"/>
+            <a:r>
+              <a:rPr lang="sv-SE" dirty="0"/>
+              <a:t>Nivå tre</a:t>
+            </a:r>
+          </a:p>
+          <a:p>
+            <a:pPr lvl="3"/>
+            <a:r>
+              <a:rPr lang="sv-SE" dirty="0"/>
+              <a:t>Nivå fyra</a:t>
+            </a:r>
+          </a:p>
+          <a:p>
+            <a:pPr lvl="4"/>
+            <a:r>
+              <a:rPr lang="sv-SE" dirty="0"/>
+              <a:t>Nivå fem</a:t>
+            </a:r>
+            <a:endParaRPr lang="en-SE" dirty="0"/>
+          </a:p>
+        </p:txBody>
+      </p:sp>
+      <p:sp>
+        <p:nvSpPr>
+          <p:cNvPr id="3" name="Platshållare för bildnummer 3">
+            <a:extLst>
+              <a:ext uri="{FF2B5EF4-FFF2-40B4-BE49-F238E27FC236}">
+                <a16:creationId xmlns:a16="http://schemas.microsoft.com/office/drawing/2014/main" id="{AE0ACF74-82A6-F22F-F543-8D4761B7D940}"/>
+              </a:ext>
+            </a:extLst>
+          </p:cNvPr>
+          <p:cNvSpPr>
+            <a:spLocks noGrp="1"/>
+          </p:cNvSpPr>
+          <p:nvPr>
+            <p:ph type="sldNum" sz="quarter" idx="12"/>
+          </p:nvPr>
+        </p:nvSpPr>
+        <p:spPr>
+          <a:xfrm>
+            <a:off x="6150142" y="4767262"/>
+            <a:ext cx="2831432" cy="274637"/>
+          </a:xfrm>
+          <a:prstGeom prst="rect">
+            <a:avLst/>
+          </a:prstGeom>
+        </p:spPr>
         <p:txBody>
           <a:bodyPr/>
-          <a:lstStyle/>
-          <a:p>
-            <a:fld id="{F7021451-1387-4CA6-816F-3879F97B5CBC}" type="slidenum">
-              <a:rPr lang="en-US"/>
-              <a:t>3</a:t>
+          <a:lstStyle>
+            <a:lvl1pPr>
+              <a:defRPr>
+                <a:latin typeface="Calibri" panose="020F0502020204030204" pitchFamily="34" charset="0"/>
+                <a:ea typeface="Calibri" panose="020F0502020204030204" pitchFamily="34" charset="0"/>
+                <a:cs typeface="Calibri" panose="020F0502020204030204" pitchFamily="34" charset="0"/>
+              </a:defRPr>
+            </a:lvl1pPr>
+          </a:lstStyle>
+          <a:p>
+            <a:pPr algn="r"/>
+            <a:fld id="{C53FA84E-D7EA-43A2-AD8F-825F36F0800C}" type="slidenum">
+              <a:rPr lang="en-SE" smtClean="0"/>
+              <a:pPr algn="r"/>
+              <a:t>‹#›</a:t>
             </a:fld>
-            <a:endParaRPr lang="en-US"/>
+            <a:endParaRPr lang="en-SE" dirty="0"/>
           </a:p>
         </p:txBody>
       </p:sp>
     </p:spTree>
     <p:extLst>
       <p:ext uri="{BB962C8B-B14F-4D97-AF65-F5344CB8AC3E}">
-        <p14:creationId xmlns:p14="http://schemas.microsoft.com/office/powerpoint/2010/main" val="1024086991"/>
+        <p14:creationId xmlns:p14="http://schemas.microsoft.com/office/powerpoint/2010/main" val="1757699052"/>
       </p:ext>
     </p:extLst>
   </p:cSld>
   <p:clrMapOvr>
     <a:masterClrMapping/>
   </p:clrMapOvr>
-</p:notes>
+  <p:hf hdr="0" ftr="0" dt="0"/>
+</p:sldLayout>
 </file>
 
-<file path=ppt/slideLayouts/slideLayout1.xml><?xml version="1.0" encoding="utf-8"?>
-<p:sldLayout xmlns:a="http://schemas.openxmlformats.org/drawingml/2006/main" xmlns:r="http://schemas.openxmlformats.org/officeDocument/2006/relationships" xmlns:p="http://schemas.openxmlformats.org/presentationml/2006/main" preserve="1">
+<file path=ppt/slideLayouts/slideLayout2.xml><?xml version="1.0" encoding="utf-8"?>
+<p:sldLayout xmlns:a="http://schemas.openxmlformats.org/drawingml/2006/main" xmlns:r="http://schemas.openxmlformats.org/officeDocument/2006/relationships" xmlns:p="http://schemas.openxmlformats.org/presentationml/2006/main" preserve="1" userDrawn="1">
+  <p:cSld name="Endast rubrik">
+    <p:spTree>
+      <p:nvGrpSpPr>
+        <p:cNvPr id="1" name=""/>
+        <p:cNvGrpSpPr/>
+        <p:nvPr/>
+      </p:nvGrpSpPr>
+      <p:grpSpPr>
+        <a:xfrm>
+          <a:off x="0" y="0"/>
+          <a:ext cx="0" cy="0"/>
+          <a:chOff x="0" y="0"/>
+          <a:chExt cx="0" cy="0"/>
+        </a:xfrm>
+      </p:grpSpPr>
+      <p:sp>
+        <p:nvSpPr>
+          <p:cNvPr id="4" name="Platshållare för sidfot 3">
+            <a:extLst>
+              <a:ext uri="{FF2B5EF4-FFF2-40B4-BE49-F238E27FC236}">
+                <a16:creationId xmlns:a16="http://schemas.microsoft.com/office/drawing/2014/main" id="{18DFA9CC-0D4C-D2A3-323B-9A386F7C66D5}"/>
+              </a:ext>
+            </a:extLst>
+          </p:cNvPr>
+          <p:cNvSpPr>
+            <a:spLocks noGrp="1"/>
+          </p:cNvSpPr>
+          <p:nvPr>
+            <p:ph type="ftr" sz="quarter" idx="11"/>
+          </p:nvPr>
+        </p:nvSpPr>
+        <p:spPr/>
+        <p:txBody>
+          <a:bodyPr/>
+          <a:lstStyle/>
+          <a:p>
+            <a:endParaRPr lang="en-SE"/>
+          </a:p>
+        </p:txBody>
+      </p:sp>
+      <p:sp>
+        <p:nvSpPr>
+          <p:cNvPr id="6" name="Platshållare för rubrik 1">
+            <a:extLst>
+              <a:ext uri="{FF2B5EF4-FFF2-40B4-BE49-F238E27FC236}">
+                <a16:creationId xmlns:a16="http://schemas.microsoft.com/office/drawing/2014/main" id="{65B41C35-209F-1C39-6425-D83DBBAD22A1}"/>
+              </a:ext>
+            </a:extLst>
+          </p:cNvPr>
+          <p:cNvSpPr>
+            <a:spLocks noGrp="1"/>
+          </p:cNvSpPr>
+          <p:nvPr>
+            <p:ph type="title"/>
+          </p:nvPr>
+        </p:nvSpPr>
+        <p:spPr>
+          <a:xfrm>
+            <a:off x="286660" y="993423"/>
+            <a:ext cx="8694913" cy="541049"/>
+          </a:xfrm>
+          <a:prstGeom prst="rect">
+            <a:avLst/>
+          </a:prstGeom>
+        </p:spPr>
+        <p:txBody>
+          <a:bodyPr vert="horz" lIns="91440" tIns="45720" rIns="91440" bIns="45720" rtlCol="0" anchor="ctr">
+            <a:noAutofit/>
+          </a:bodyPr>
+          <a:lstStyle/>
+          <a:p>
+            <a:r>
+              <a:rPr lang="sv-SE" dirty="0"/>
+              <a:t>Klicka här för att ändra mall för rubrikformat</a:t>
+            </a:r>
+            <a:endParaRPr lang="en-SE" dirty="0"/>
+          </a:p>
+        </p:txBody>
+      </p:sp>
+      <p:sp>
+        <p:nvSpPr>
+          <p:cNvPr id="2" name="Platshållare för bildnummer 3">
+            <a:extLst>
+              <a:ext uri="{FF2B5EF4-FFF2-40B4-BE49-F238E27FC236}">
+                <a16:creationId xmlns:a16="http://schemas.microsoft.com/office/drawing/2014/main" id="{178C76C8-7DA8-3EB4-7968-0F0E384898AC}"/>
+              </a:ext>
+            </a:extLst>
+          </p:cNvPr>
+          <p:cNvSpPr>
+            <a:spLocks noGrp="1"/>
+          </p:cNvSpPr>
+          <p:nvPr>
+            <p:ph type="sldNum" sz="quarter" idx="12"/>
+          </p:nvPr>
+        </p:nvSpPr>
+        <p:spPr>
+          <a:xfrm>
+            <a:off x="6150142" y="4767262"/>
+            <a:ext cx="2831432" cy="274637"/>
+          </a:xfrm>
+          <a:prstGeom prst="rect">
+            <a:avLst/>
+          </a:prstGeom>
+        </p:spPr>
+        <p:txBody>
+          <a:bodyPr/>
+          <a:lstStyle>
+            <a:lvl1pPr>
+              <a:defRPr>
+                <a:latin typeface="Calibri" panose="020F0502020204030204" pitchFamily="34" charset="0"/>
+                <a:ea typeface="Calibri" panose="020F0502020204030204" pitchFamily="34" charset="0"/>
+                <a:cs typeface="Calibri" panose="020F0502020204030204" pitchFamily="34" charset="0"/>
+              </a:defRPr>
+            </a:lvl1pPr>
+          </a:lstStyle>
+          <a:p>
+            <a:pPr algn="r"/>
+            <a:fld id="{C53FA84E-D7EA-43A2-AD8F-825F36F0800C}" type="slidenum">
+              <a:rPr lang="en-SE" smtClean="0"/>
+              <a:pPr algn="r"/>
+              <a:t>‹#›</a:t>
+            </a:fld>
+            <a:endParaRPr lang="en-SE" dirty="0"/>
+          </a:p>
+        </p:txBody>
+      </p:sp>
+    </p:spTree>
+    <p:extLst>
+      <p:ext uri="{BB962C8B-B14F-4D97-AF65-F5344CB8AC3E}">
+        <p14:creationId xmlns:p14="http://schemas.microsoft.com/office/powerpoint/2010/main" val="1904796889"/>
+      </p:ext>
+    </p:extLst>
+  </p:cSld>
+  <p:clrMapOvr>
+    <a:masterClrMapping/>
+  </p:clrMapOvr>
+</p:sldLayout>
+</file>
+
+<file path=ppt/slideLayouts/slideLayout3.xml><?xml version="1.0" encoding="utf-8"?>
+<p:sldLayout xmlns:a="http://schemas.openxmlformats.org/drawingml/2006/main" xmlns:r="http://schemas.openxmlformats.org/officeDocument/2006/relationships" xmlns:p="http://schemas.openxmlformats.org/presentationml/2006/main" preserve="1" userDrawn="1">
+  <p:cSld name="Två delar">
+    <p:spTree>
+      <p:nvGrpSpPr>
+        <p:cNvPr id="1" name=""/>
+        <p:cNvGrpSpPr/>
+        <p:nvPr/>
+      </p:nvGrpSpPr>
+      <p:grpSpPr>
+        <a:xfrm>
+          <a:off x="0" y="0"/>
+          <a:ext cx="0" cy="0"/>
+          <a:chOff x="0" y="0"/>
+          <a:chExt cx="0" cy="0"/>
+        </a:xfrm>
+      </p:grpSpPr>
+      <p:sp>
+        <p:nvSpPr>
+          <p:cNvPr id="3" name="Platshållare för innehåll 2">
+            <a:extLst>
+              <a:ext uri="{FF2B5EF4-FFF2-40B4-BE49-F238E27FC236}">
+                <a16:creationId xmlns:a16="http://schemas.microsoft.com/office/drawing/2014/main" id="{376B0E7B-7161-7CA2-0230-2A345F7CEDD3}"/>
+              </a:ext>
+            </a:extLst>
+          </p:cNvPr>
+          <p:cNvSpPr>
+            <a:spLocks noGrp="1"/>
+          </p:cNvSpPr>
+          <p:nvPr>
+            <p:ph sz="half" idx="1"/>
+          </p:nvPr>
+        </p:nvSpPr>
+        <p:spPr>
+          <a:xfrm>
+            <a:off x="286660" y="1669411"/>
+            <a:ext cx="4285339" cy="2962914"/>
+          </a:xfrm>
+          <a:prstGeom prst="rect">
+            <a:avLst/>
+          </a:prstGeom>
+        </p:spPr>
+        <p:txBody>
+          <a:bodyPr>
+            <a:noAutofit/>
+          </a:bodyPr>
+          <a:lstStyle/>
+          <a:p>
+            <a:pPr lvl="0"/>
+            <a:r>
+              <a:rPr lang="sv-SE" dirty="0"/>
+              <a:t>Klicka här för att ändra format på bakgrundstexten</a:t>
+            </a:r>
+          </a:p>
+          <a:p>
+            <a:pPr lvl="1"/>
+            <a:r>
+              <a:rPr lang="sv-SE" dirty="0"/>
+              <a:t>Nivå två</a:t>
+            </a:r>
+          </a:p>
+          <a:p>
+            <a:pPr lvl="2"/>
+            <a:r>
+              <a:rPr lang="sv-SE" dirty="0"/>
+              <a:t>Nivå tre</a:t>
+            </a:r>
+          </a:p>
+          <a:p>
+            <a:pPr lvl="3"/>
+            <a:r>
+              <a:rPr lang="sv-SE" dirty="0"/>
+              <a:t>Nivå fyra</a:t>
+            </a:r>
+          </a:p>
+          <a:p>
+            <a:pPr lvl="4"/>
+            <a:r>
+              <a:rPr lang="sv-SE" dirty="0"/>
+              <a:t>Nivå fem</a:t>
+            </a:r>
+            <a:endParaRPr lang="en-SE" dirty="0"/>
+          </a:p>
+        </p:txBody>
+      </p:sp>
+      <p:sp>
+        <p:nvSpPr>
+          <p:cNvPr id="4" name="Platshållare för innehåll 3">
+            <a:extLst>
+              <a:ext uri="{FF2B5EF4-FFF2-40B4-BE49-F238E27FC236}">
+                <a16:creationId xmlns:a16="http://schemas.microsoft.com/office/drawing/2014/main" id="{5E6577D3-FE7D-29C8-96EA-738EBBBACE61}"/>
+              </a:ext>
+            </a:extLst>
+          </p:cNvPr>
+          <p:cNvSpPr>
+            <a:spLocks noGrp="1"/>
+          </p:cNvSpPr>
+          <p:nvPr>
+            <p:ph sz="half" idx="2"/>
+          </p:nvPr>
+        </p:nvSpPr>
+        <p:spPr>
+          <a:xfrm>
+            <a:off x="4648199" y="1669410"/>
+            <a:ext cx="4333373" cy="2962915"/>
+          </a:xfrm>
+          <a:prstGeom prst="rect">
+            <a:avLst/>
+          </a:prstGeom>
+        </p:spPr>
+        <p:txBody>
+          <a:bodyPr>
+            <a:noAutofit/>
+          </a:bodyPr>
+          <a:lstStyle/>
+          <a:p>
+            <a:pPr lvl="0"/>
+            <a:r>
+              <a:rPr lang="sv-SE" dirty="0"/>
+              <a:t>Klicka här för att ändra format på bakgrundstexten</a:t>
+            </a:r>
+          </a:p>
+          <a:p>
+            <a:pPr lvl="1"/>
+            <a:r>
+              <a:rPr lang="sv-SE" dirty="0"/>
+              <a:t>Nivå två</a:t>
+            </a:r>
+          </a:p>
+          <a:p>
+            <a:pPr lvl="2"/>
+            <a:r>
+              <a:rPr lang="sv-SE" dirty="0"/>
+              <a:t>Nivå tre</a:t>
+            </a:r>
+          </a:p>
+          <a:p>
+            <a:pPr lvl="3"/>
+            <a:r>
+              <a:rPr lang="sv-SE" dirty="0"/>
+              <a:t>Nivå fyra</a:t>
+            </a:r>
+          </a:p>
+          <a:p>
+            <a:pPr lvl="4"/>
+            <a:r>
+              <a:rPr lang="sv-SE" dirty="0"/>
+              <a:t>Nivå fem</a:t>
+            </a:r>
+            <a:endParaRPr lang="en-SE" dirty="0"/>
+          </a:p>
+        </p:txBody>
+      </p:sp>
+      <p:sp>
+        <p:nvSpPr>
+          <p:cNvPr id="6" name="Platshållare för sidfot 5">
+            <a:extLst>
+              <a:ext uri="{FF2B5EF4-FFF2-40B4-BE49-F238E27FC236}">
+                <a16:creationId xmlns:a16="http://schemas.microsoft.com/office/drawing/2014/main" id="{64D15008-CA65-0EF0-7862-0188179D365E}"/>
+              </a:ext>
+            </a:extLst>
+          </p:cNvPr>
+          <p:cNvSpPr>
+            <a:spLocks noGrp="1"/>
+          </p:cNvSpPr>
+          <p:nvPr>
+            <p:ph type="ftr" sz="quarter" idx="11"/>
+          </p:nvPr>
+        </p:nvSpPr>
+        <p:spPr/>
+        <p:txBody>
+          <a:bodyPr/>
+          <a:lstStyle/>
+          <a:p>
+            <a:endParaRPr lang="en-SE"/>
+          </a:p>
+        </p:txBody>
+      </p:sp>
+      <p:sp>
+        <p:nvSpPr>
+          <p:cNvPr id="8" name="Platshållare för rubrik 1">
+            <a:extLst>
+              <a:ext uri="{FF2B5EF4-FFF2-40B4-BE49-F238E27FC236}">
+                <a16:creationId xmlns:a16="http://schemas.microsoft.com/office/drawing/2014/main" id="{5533356E-B98E-C815-0AC4-A7E5D9595151}"/>
+              </a:ext>
+            </a:extLst>
+          </p:cNvPr>
+          <p:cNvSpPr>
+            <a:spLocks noGrp="1"/>
+          </p:cNvSpPr>
+          <p:nvPr>
+            <p:ph type="title"/>
+          </p:nvPr>
+        </p:nvSpPr>
+        <p:spPr>
+          <a:xfrm>
+            <a:off x="286660" y="993423"/>
+            <a:ext cx="8694913" cy="541049"/>
+          </a:xfrm>
+          <a:prstGeom prst="rect">
+            <a:avLst/>
+          </a:prstGeom>
+        </p:spPr>
+        <p:txBody>
+          <a:bodyPr vert="horz" lIns="91440" tIns="45720" rIns="91440" bIns="45720" rtlCol="0" anchor="ctr">
+            <a:noAutofit/>
+          </a:bodyPr>
+          <a:lstStyle/>
+          <a:p>
+            <a:r>
+              <a:rPr lang="sv-SE" dirty="0"/>
+              <a:t>Klicka här för att ändra mall för rubrikformat</a:t>
+            </a:r>
+            <a:endParaRPr lang="en-SE" dirty="0"/>
+          </a:p>
+        </p:txBody>
+      </p:sp>
+      <p:sp>
+        <p:nvSpPr>
+          <p:cNvPr id="2" name="Platshållare för bildnummer 3">
+            <a:extLst>
+              <a:ext uri="{FF2B5EF4-FFF2-40B4-BE49-F238E27FC236}">
+                <a16:creationId xmlns:a16="http://schemas.microsoft.com/office/drawing/2014/main" id="{71D68C3C-F026-3686-675F-5E2E1FD5E9D1}"/>
+              </a:ext>
+            </a:extLst>
+          </p:cNvPr>
+          <p:cNvSpPr>
+            <a:spLocks noGrp="1"/>
+          </p:cNvSpPr>
+          <p:nvPr>
+            <p:ph type="sldNum" sz="quarter" idx="12"/>
+          </p:nvPr>
+        </p:nvSpPr>
+        <p:spPr>
+          <a:xfrm>
+            <a:off x="6150142" y="4767262"/>
+            <a:ext cx="2831432" cy="274637"/>
+          </a:xfrm>
+          <a:prstGeom prst="rect">
+            <a:avLst/>
+          </a:prstGeom>
+        </p:spPr>
+        <p:txBody>
+          <a:bodyPr/>
+          <a:lstStyle>
+            <a:lvl1pPr>
+              <a:defRPr>
+                <a:latin typeface="Calibri" panose="020F0502020204030204" pitchFamily="34" charset="0"/>
+                <a:ea typeface="Calibri" panose="020F0502020204030204" pitchFamily="34" charset="0"/>
+                <a:cs typeface="Calibri" panose="020F0502020204030204" pitchFamily="34" charset="0"/>
+              </a:defRPr>
+            </a:lvl1pPr>
+          </a:lstStyle>
+          <a:p>
+            <a:pPr algn="r"/>
+            <a:fld id="{C53FA84E-D7EA-43A2-AD8F-825F36F0800C}" type="slidenum">
+              <a:rPr lang="en-SE" smtClean="0"/>
+              <a:pPr algn="r"/>
+              <a:t>‹#›</a:t>
+            </a:fld>
+            <a:endParaRPr lang="en-SE" dirty="0"/>
+          </a:p>
+        </p:txBody>
+      </p:sp>
+    </p:spTree>
+    <p:extLst>
+      <p:ext uri="{BB962C8B-B14F-4D97-AF65-F5344CB8AC3E}">
+        <p14:creationId xmlns:p14="http://schemas.microsoft.com/office/powerpoint/2010/main" val="3780897885"/>
+      </p:ext>
+    </p:extLst>
+  </p:cSld>
+  <p:clrMapOvr>
+    <a:masterClrMapping/>
+  </p:clrMapOvr>
+</p:sldLayout>
+</file>
+
+<file path=ppt/slideLayouts/slideLayout4.xml><?xml version="1.0" encoding="utf-8"?>
+<p:sldLayout xmlns:a="http://schemas.openxmlformats.org/drawingml/2006/main" xmlns:r="http://schemas.openxmlformats.org/officeDocument/2006/relationships" xmlns:p="http://schemas.openxmlformats.org/presentationml/2006/main" preserve="1" userDrawn="1">
+  <p:cSld name="Rubrikbild">
+    <p:spTree>
+      <p:nvGrpSpPr>
+        <p:cNvPr id="1" name=""/>
+        <p:cNvGrpSpPr/>
+        <p:nvPr/>
+      </p:nvGrpSpPr>
+      <p:grpSpPr>
+        <a:xfrm>
+          <a:off x="0" y="0"/>
+          <a:ext cx="0" cy="0"/>
+          <a:chOff x="0" y="0"/>
+          <a:chExt cx="0" cy="0"/>
+        </a:xfrm>
+      </p:grpSpPr>
+      <p:sp>
+        <p:nvSpPr>
+          <p:cNvPr id="5" name="Platshållare för sidfot 4">
+            <a:extLst>
+              <a:ext uri="{FF2B5EF4-FFF2-40B4-BE49-F238E27FC236}">
+                <a16:creationId xmlns:a16="http://schemas.microsoft.com/office/drawing/2014/main" id="{36526CB9-5F04-1B76-49FA-79556E29DEA7}"/>
+              </a:ext>
+            </a:extLst>
+          </p:cNvPr>
+          <p:cNvSpPr>
+            <a:spLocks noGrp="1"/>
+          </p:cNvSpPr>
+          <p:nvPr>
+            <p:ph type="ftr" sz="quarter" idx="11"/>
+          </p:nvPr>
+        </p:nvSpPr>
+        <p:spPr/>
+        <p:txBody>
+          <a:bodyPr/>
+          <a:lstStyle/>
+          <a:p>
+            <a:endParaRPr lang="en-SE"/>
+          </a:p>
+        </p:txBody>
+      </p:sp>
+      <p:sp>
+        <p:nvSpPr>
+          <p:cNvPr id="2" name="Platshållare för bildnummer 3">
+            <a:extLst>
+              <a:ext uri="{FF2B5EF4-FFF2-40B4-BE49-F238E27FC236}">
+                <a16:creationId xmlns:a16="http://schemas.microsoft.com/office/drawing/2014/main" id="{44F172C3-9839-5757-A5F6-51833DBFDF4C}"/>
+              </a:ext>
+            </a:extLst>
+          </p:cNvPr>
+          <p:cNvSpPr>
+            <a:spLocks noGrp="1"/>
+          </p:cNvSpPr>
+          <p:nvPr>
+            <p:ph type="sldNum" sz="quarter" idx="12"/>
+          </p:nvPr>
+        </p:nvSpPr>
+        <p:spPr>
+          <a:xfrm>
+            <a:off x="6150142" y="4767262"/>
+            <a:ext cx="2831432" cy="274637"/>
+          </a:xfrm>
+          <a:prstGeom prst="rect">
+            <a:avLst/>
+          </a:prstGeom>
+        </p:spPr>
+        <p:txBody>
+          <a:bodyPr/>
+          <a:lstStyle>
+            <a:lvl1pPr>
+              <a:defRPr sz="900">
+                <a:solidFill>
+                  <a:srgbClr val="1E3A5F"/>
+                </a:solidFill>
+                <a:latin typeface="Calibri" panose="020F0502020204030204" pitchFamily="34" charset="0"/>
+                <a:ea typeface="Calibri" panose="020F0502020204030204" pitchFamily="34" charset="0"/>
+                <a:cs typeface="Calibri" panose="020F0502020204030204" pitchFamily="34" charset="0"/>
+              </a:defRPr>
+            </a:lvl1pPr>
+          </a:lstStyle>
+          <a:p>
+            <a:pPr algn="r"/>
+            <a:fld id="{C53FA84E-D7EA-43A2-AD8F-825F36F0800C}" type="slidenum">
+              <a:rPr lang="en-SE" smtClean="0"/>
+              <a:pPr algn="r"/>
+              <a:t>‹#›</a:t>
+            </a:fld>
+            <a:endParaRPr lang="en-SE" dirty="0"/>
+          </a:p>
+        </p:txBody>
+      </p:sp>
+    </p:spTree>
+    <p:extLst>
+      <p:ext uri="{BB962C8B-B14F-4D97-AF65-F5344CB8AC3E}">
+        <p14:creationId xmlns:p14="http://schemas.microsoft.com/office/powerpoint/2010/main" val="846124101"/>
+      </p:ext>
+    </p:extLst>
+  </p:cSld>
+  <p:clrMapOvr>
+    <a:masterClrMapping/>
+  </p:clrMapOvr>
+</p:sldLayout>
+</file>
+
+<file path=ppt/slideLayouts/slideLayout5.xml><?xml version="1.0" encoding="utf-8"?>
+<p:sldLayout xmlns:a="http://schemas.openxmlformats.org/drawingml/2006/main" xmlns:r="http://schemas.openxmlformats.org/officeDocument/2006/relationships" xmlns:p="http://schemas.openxmlformats.org/presentationml/2006/main">
   <p:cSld name="DEFAULT">
     <p:bg>
       <p:bgRef idx="1001">
@@ -745,6 +1163,11 @@
         </a:xfrm>
       </p:grpSpPr>
     </p:spTree>
+    <p:extLst>
+      <p:ext uri="{BB962C8B-B14F-4D97-AF65-F5344CB8AC3E}">
+        <p14:creationId xmlns:p14="http://schemas.microsoft.com/office/powerpoint/2010/main" val="694758914"/>
+      </p:ext>
+    </p:extLst>
   </p:cSld>
   <p:clrMapOvr>
     <a:masterClrMapping/>
@@ -753,8 +1176,13 @@
 </file>
 
 <file path=ppt/slideMasters/slideMaster1.xml><?xml version="1.0" encoding="utf-8"?>
-<p:sldMaster xmlns:a="http://schemas.openxmlformats.org/drawingml/2006/main" xmlns:r="http://schemas.openxmlformats.org/officeDocument/2006/relationships" xmlns:p="http://schemas.openxmlformats.org/presentationml/2006/main">
+<p:sldMaster xmlns:a="http://schemas.openxmlformats.org/drawingml/2006/main" xmlns:r="http://schemas.openxmlformats.org/officeDocument/2006/relationships" xmlns:p="http://schemas.openxmlformats.org/presentationml/2006/main" preserve="1">
   <p:cSld>
+    <p:bg>
+      <p:bgRef idx="1001">
+        <a:schemeClr val="bg1"/>
+      </p:bgRef>
+    </p:bg>
     <p:spTree>
       <p:nvGrpSpPr>
         <p:cNvPr id="1" name=""/>
@@ -769,113 +1197,440 @@
           <a:chExt cx="0" cy="0"/>
         </a:xfrm>
       </p:grpSpPr>
+      <p:sp>
+        <p:nvSpPr>
+          <p:cNvPr id="2" name="Platshållare för rubrik 1">
+            <a:extLst>
+              <a:ext uri="{FF2B5EF4-FFF2-40B4-BE49-F238E27FC236}">
+                <a16:creationId xmlns:a16="http://schemas.microsoft.com/office/drawing/2014/main" id="{848A7E77-8A88-0DD3-9503-B94D1CFE3C81}"/>
+              </a:ext>
+            </a:extLst>
+          </p:cNvPr>
+          <p:cNvSpPr>
+            <a:spLocks noGrp="1"/>
+          </p:cNvSpPr>
+          <p:nvPr>
+            <p:ph type="title"/>
+          </p:nvPr>
+        </p:nvSpPr>
+        <p:spPr>
+          <a:xfrm>
+            <a:off x="286660" y="993423"/>
+            <a:ext cx="8694913" cy="541049"/>
+          </a:xfrm>
+          <a:prstGeom prst="rect">
+            <a:avLst/>
+          </a:prstGeom>
+        </p:spPr>
+        <p:txBody>
+          <a:bodyPr vert="horz" lIns="91440" tIns="45720" rIns="91440" bIns="45720" rtlCol="0" anchor="ctr">
+            <a:noAutofit/>
+          </a:bodyPr>
+          <a:lstStyle/>
+          <a:p>
+            <a:r>
+              <a:rPr lang="sv-SE" dirty="0"/>
+              <a:t>Klicka här för att ändra mall för rubrikformat</a:t>
+            </a:r>
+            <a:endParaRPr lang="en-SE" dirty="0"/>
+          </a:p>
+        </p:txBody>
+      </p:sp>
+      <p:sp>
+        <p:nvSpPr>
+          <p:cNvPr id="5" name="Platshållare för sidfot 4">
+            <a:extLst>
+              <a:ext uri="{FF2B5EF4-FFF2-40B4-BE49-F238E27FC236}">
+                <a16:creationId xmlns:a16="http://schemas.microsoft.com/office/drawing/2014/main" id="{848D5609-41DF-4769-1613-9E919EF14E8D}"/>
+              </a:ext>
+            </a:extLst>
+          </p:cNvPr>
+          <p:cNvSpPr>
+            <a:spLocks noGrp="1"/>
+          </p:cNvSpPr>
+          <p:nvPr>
+            <p:ph type="ftr" sz="quarter" idx="3"/>
+          </p:nvPr>
+        </p:nvSpPr>
+        <p:spPr>
+          <a:xfrm>
+            <a:off x="2981553" y="4767263"/>
+            <a:ext cx="3086100" cy="274637"/>
+          </a:xfrm>
+          <a:prstGeom prst="rect">
+            <a:avLst/>
+          </a:prstGeom>
+        </p:spPr>
+        <p:txBody>
+          <a:bodyPr vert="horz" lIns="91440" tIns="45720" rIns="91440" bIns="45720" rtlCol="0" anchor="ctr"/>
+          <a:lstStyle>
+            <a:lvl1pPr algn="ctr">
+              <a:defRPr sz="900">
+                <a:solidFill>
+                  <a:schemeClr val="tx1">
+                    <a:tint val="82000"/>
+                  </a:schemeClr>
+                </a:solidFill>
+                <a:latin typeface="Calibri" panose="020F0502020204030204" pitchFamily="34" charset="0"/>
+                <a:ea typeface="Calibri" panose="020F0502020204030204" pitchFamily="34" charset="0"/>
+                <a:cs typeface="Calibri" panose="020F0502020204030204" pitchFamily="34" charset="0"/>
+              </a:defRPr>
+            </a:lvl1pPr>
+          </a:lstStyle>
+          <a:p>
+            <a:endParaRPr lang="en-SE" sz="900" dirty="0"/>
+          </a:p>
+        </p:txBody>
+      </p:sp>
+      <p:pic>
+        <p:nvPicPr>
+          <p:cNvPr id="8" name="Image 0" descr="fraunhofer.png">
+            <a:extLst>
+              <a:ext uri="{FF2B5EF4-FFF2-40B4-BE49-F238E27FC236}">
+                <a16:creationId xmlns:a16="http://schemas.microsoft.com/office/drawing/2014/main" id="{207F2430-F5D4-B12A-88BB-2083BF9EDB55}"/>
+              </a:ext>
+            </a:extLst>
+          </p:cNvPr>
+          <p:cNvPicPr>
+            <a:picLocks noChangeAspect="1"/>
+          </p:cNvPicPr>
+          <p:nvPr userDrawn="1"/>
+        </p:nvPicPr>
+        <p:blipFill>
+          <a:blip r:embed="rId7"/>
+          <a:stretch>
+            <a:fillRect/>
+          </a:stretch>
+        </p:blipFill>
+        <p:spPr>
+          <a:xfrm>
+            <a:off x="679788" y="237744"/>
+            <a:ext cx="1475065" cy="420624"/>
+          </a:xfrm>
+          <a:prstGeom prst="rect">
+            <a:avLst/>
+          </a:prstGeom>
+        </p:spPr>
+      </p:pic>
+      <p:pic>
+        <p:nvPicPr>
+          <p:cNvPr id="10" name="Image 1" descr="chalmers.png">
+            <a:extLst>
+              <a:ext uri="{FF2B5EF4-FFF2-40B4-BE49-F238E27FC236}">
+                <a16:creationId xmlns:a16="http://schemas.microsoft.com/office/drawing/2014/main" id="{E74BDE26-B585-CB92-1234-39C4706E6997}"/>
+              </a:ext>
+            </a:extLst>
+          </p:cNvPr>
+          <p:cNvPicPr>
+            <a:picLocks noChangeAspect="1"/>
+          </p:cNvPicPr>
+          <p:nvPr userDrawn="1"/>
+        </p:nvPicPr>
+        <p:blipFill>
+          <a:blip r:embed="rId8"/>
+          <a:stretch>
+            <a:fillRect/>
+          </a:stretch>
+        </p:blipFill>
+        <p:spPr>
+          <a:xfrm>
+            <a:off x="2843479" y="237744"/>
+            <a:ext cx="1353922" cy="420624"/>
+          </a:xfrm>
+          <a:prstGeom prst="rect">
+            <a:avLst/>
+          </a:prstGeom>
+        </p:spPr>
+      </p:pic>
+      <p:pic>
+        <p:nvPicPr>
+          <p:cNvPr id="12" name="Image 2" descr="goteborg.png">
+            <a:extLst>
+              <a:ext uri="{FF2B5EF4-FFF2-40B4-BE49-F238E27FC236}">
+                <a16:creationId xmlns:a16="http://schemas.microsoft.com/office/drawing/2014/main" id="{CB9F34A3-66D5-7251-13A9-2E3A25330337}"/>
+              </a:ext>
+            </a:extLst>
+          </p:cNvPr>
+          <p:cNvPicPr>
+            <a:picLocks noChangeAspect="1"/>
+          </p:cNvPicPr>
+          <p:nvPr userDrawn="1"/>
+        </p:nvPicPr>
+        <p:blipFill>
+          <a:blip r:embed="rId9"/>
+          <a:stretch>
+            <a:fillRect/>
+          </a:stretch>
+        </p:blipFill>
+        <p:spPr>
+          <a:xfrm>
+            <a:off x="4881282" y="195682"/>
+            <a:ext cx="1484555" cy="504749"/>
+          </a:xfrm>
+          <a:prstGeom prst="rect">
+            <a:avLst/>
+          </a:prstGeom>
+        </p:spPr>
+      </p:pic>
+      <p:pic>
+        <p:nvPicPr>
+          <p:cNvPr id="14" name="Image 3" descr="napoli.png">
+            <a:extLst>
+              <a:ext uri="{FF2B5EF4-FFF2-40B4-BE49-F238E27FC236}">
+                <a16:creationId xmlns:a16="http://schemas.microsoft.com/office/drawing/2014/main" id="{55D7377C-6439-5536-D98D-54E9EA994BBD}"/>
+              </a:ext>
+            </a:extLst>
+          </p:cNvPr>
+          <p:cNvPicPr>
+            <a:picLocks noChangeAspect="1"/>
+          </p:cNvPicPr>
+          <p:nvPr userDrawn="1"/>
+        </p:nvPicPr>
+        <p:blipFill>
+          <a:blip r:embed="rId10"/>
+          <a:stretch>
+            <a:fillRect/>
+          </a:stretch>
+        </p:blipFill>
+        <p:spPr>
+          <a:xfrm>
+            <a:off x="7077887" y="237744"/>
+            <a:ext cx="1297585" cy="420624"/>
+          </a:xfrm>
+          <a:prstGeom prst="rect">
+            <a:avLst/>
+          </a:prstGeom>
+        </p:spPr>
+      </p:pic>
+      <p:sp>
+        <p:nvSpPr>
+          <p:cNvPr id="20" name="Text 2">
+            <a:extLst>
+              <a:ext uri="{FF2B5EF4-FFF2-40B4-BE49-F238E27FC236}">
+                <a16:creationId xmlns:a16="http://schemas.microsoft.com/office/drawing/2014/main" id="{6AA9388E-EECF-ACC4-D00F-A5C3B4142F28}"/>
+              </a:ext>
+            </a:extLst>
+          </p:cNvPr>
+          <p:cNvSpPr/>
+          <p:nvPr userDrawn="1"/>
+        </p:nvSpPr>
+        <p:spPr>
+          <a:xfrm>
+            <a:off x="365760" y="4736592"/>
+            <a:ext cx="2057400" cy="305308"/>
+          </a:xfrm>
+          <a:prstGeom prst="rect">
+            <a:avLst/>
+          </a:prstGeom>
+          <a:noFill/>
+          <a:ln/>
+        </p:spPr>
+        <p:txBody>
+          <a:bodyPr wrap="square" lIns="0" tIns="0" rIns="0" bIns="0" rtlCol="0" anchor="ctr"/>
+          <a:lstStyle/>
+          <a:p>
+            <a:pPr marL="0" indent="0" algn="l">
+              <a:buNone/>
+            </a:pPr>
+            <a:r>
+              <a:rPr lang="en-US" sz="900" dirty="0">
+                <a:solidFill>
+                  <a:srgbClr val="7A8794"/>
+                </a:solidFill>
+                <a:latin typeface="Calibri" pitchFamily="34" charset="0"/>
+                <a:ea typeface="Calibri" pitchFamily="34" charset="-122"/>
+                <a:cs typeface="Calibri" pitchFamily="34" charset="-120"/>
+              </a:rPr>
+              <a:t>FSE 2026  ·  Montréal  ·  5–9 July 2026</a:t>
+            </a:r>
+            <a:endParaRPr lang="en-US" sz="900" dirty="0"/>
+          </a:p>
+        </p:txBody>
+      </p:sp>
+      <p:sp>
+        <p:nvSpPr>
+          <p:cNvPr id="7" name="Platshållare för bildnummer 3">
+            <a:extLst>
+              <a:ext uri="{FF2B5EF4-FFF2-40B4-BE49-F238E27FC236}">
+                <a16:creationId xmlns:a16="http://schemas.microsoft.com/office/drawing/2014/main" id="{766E9B07-F5C6-58A6-B9DE-FF54E3556443}"/>
+              </a:ext>
+            </a:extLst>
+          </p:cNvPr>
+          <p:cNvSpPr>
+            <a:spLocks noGrp="1"/>
+          </p:cNvSpPr>
+          <p:nvPr>
+            <p:ph type="sldNum" sz="quarter" idx="4"/>
+          </p:nvPr>
+        </p:nvSpPr>
+        <p:spPr>
+          <a:xfrm>
+            <a:off x="6150142" y="4767262"/>
+            <a:ext cx="2831432" cy="274637"/>
+          </a:xfrm>
+          <a:prstGeom prst="rect">
+            <a:avLst/>
+          </a:prstGeom>
+        </p:spPr>
+        <p:txBody>
+          <a:bodyPr/>
+          <a:lstStyle>
+            <a:lvl1pPr>
+              <a:defRPr sz="900">
+                <a:latin typeface="Calibri" panose="020F0502020204030204" pitchFamily="34" charset="0"/>
+                <a:ea typeface="Calibri" panose="020F0502020204030204" pitchFamily="34" charset="0"/>
+                <a:cs typeface="Calibri" panose="020F0502020204030204" pitchFamily="34" charset="0"/>
+              </a:defRPr>
+            </a:lvl1pPr>
+          </a:lstStyle>
+          <a:p>
+            <a:pPr algn="r"/>
+            <a:fld id="{C53FA84E-D7EA-43A2-AD8F-825F36F0800C}" type="slidenum">
+              <a:rPr lang="en-SE" smtClean="0"/>
+              <a:pPr algn="r"/>
+              <a:t>‹#›</a:t>
+            </a:fld>
+            <a:endParaRPr lang="en-SE" sz="900" dirty="0"/>
+          </a:p>
+        </p:txBody>
+      </p:sp>
     </p:spTree>
+    <p:extLst>
+      <p:ext uri="{BB962C8B-B14F-4D97-AF65-F5344CB8AC3E}">
+        <p14:creationId xmlns:p14="http://schemas.microsoft.com/office/powerpoint/2010/main" val="2647543035"/>
+      </p:ext>
+    </p:extLst>
   </p:cSld>
   <p:clrMap bg1="lt1" tx1="dk1" bg2="lt2" tx2="dk2" accent1="accent1" accent2="accent2" accent3="accent3" accent4="accent4" accent5="accent5" accent6="accent6" hlink="hlink" folHlink="folHlink"/>
   <p:sldLayoutIdLst>
-    <p:sldLayoutId id="2147483649" r:id="rId1"/>
+    <p:sldLayoutId id="2147483652" r:id="rId1"/>
+    <p:sldLayoutId id="2147483656" r:id="rId2"/>
+    <p:sldLayoutId id="2147483654" r:id="rId3"/>
+    <p:sldLayoutId id="2147483651" r:id="rId4"/>
+    <p:sldLayoutId id="2147483662" r:id="rId5"/>
   </p:sldLayoutIdLst>
-  <p:hf sldNum="0" hdr="0" ftr="0" dt="0"/>
+  <p:hf hdr="0" dt="0"/>
   <p:txStyles>
     <p:titleStyle>
-      <a:lvl1pPr algn="ctr" defTabSz="914400" rtl="0" eaLnBrk="1" latinLnBrk="0" hangingPunct="1">
+      <a:lvl1pPr algn="l" defTabSz="914400" rtl="0" eaLnBrk="1" latinLnBrk="0" hangingPunct="1">
+        <a:lnSpc>
+          <a:spcPct val="90000"/>
+        </a:lnSpc>
         <a:spcBef>
           <a:spcPct val="0"/>
         </a:spcBef>
         <a:buNone/>
-        <a:defRPr sz="4400" kern="1200">
+        <a:defRPr sz="2600" b="1" kern="1200">
           <a:solidFill>
-            <a:schemeClr val="tx1"/>
+            <a:srgbClr val="1E3A5F"/>
           </a:solidFill>
-          <a:latin typeface="+mj-lt"/>
-          <a:ea typeface="+mj-ea"/>
+          <a:latin typeface="Cambria" panose="02040503050406030204" pitchFamily="18" charset="0"/>
+          <a:ea typeface="Cambria" panose="02040503050406030204" pitchFamily="18" charset="0"/>
           <a:cs typeface="+mj-cs"/>
         </a:defRPr>
       </a:lvl1pPr>
     </p:titleStyle>
     <p:bodyStyle>
-      <a:lvl1pPr marL="342900" indent="-342900" algn="l" defTabSz="914400" rtl="0" eaLnBrk="1" latinLnBrk="0" hangingPunct="1">
+      <a:lvl1pPr marL="228600" indent="-228600" algn="l" defTabSz="914400" rtl="0" eaLnBrk="1" latinLnBrk="0" hangingPunct="1">
+        <a:lnSpc>
+          <a:spcPct val="90000"/>
+        </a:lnSpc>
         <a:spcBef>
-          <a:spcPct val="20000"/>
+          <a:spcPts val="1000"/>
         </a:spcBef>
-        <a:buFont typeface="Arial" pitchFamily="34" charset="0"/>
+        <a:buFont typeface="Arial" panose="020B0604020202020204" pitchFamily="34" charset="0"/>
         <a:buChar char="•"/>
-        <a:defRPr sz="3200" kern="1200">
-          <a:solidFill>
-            <a:schemeClr val="tx1"/>
-          </a:solidFill>
-          <a:latin typeface="+mn-lt"/>
-          <a:ea typeface="+mn-ea"/>
-          <a:cs typeface="+mn-cs"/>
-        </a:defRPr>
-      </a:lvl1pPr>
-      <a:lvl2pPr marL="742950" indent="-285750" algn="l" defTabSz="914400" rtl="0" eaLnBrk="1" latinLnBrk="0" hangingPunct="1">
-        <a:spcBef>
-          <a:spcPct val="20000"/>
-        </a:spcBef>
-        <a:buFont typeface="Arial" pitchFamily="34" charset="0"/>
-        <a:buChar char="–"/>
-        <a:defRPr sz="2800" kern="1200">
-          <a:solidFill>
-            <a:schemeClr val="tx1"/>
-          </a:solidFill>
-          <a:latin typeface="+mn-lt"/>
-          <a:ea typeface="+mn-ea"/>
-          <a:cs typeface="+mn-cs"/>
-        </a:defRPr>
-      </a:lvl2pPr>
-      <a:lvl3pPr marL="1143000" indent="-228600" algn="l" defTabSz="914400" rtl="0" eaLnBrk="1" latinLnBrk="0" hangingPunct="1">
-        <a:spcBef>
-          <a:spcPct val="20000"/>
-        </a:spcBef>
-        <a:buFont typeface="Arial" pitchFamily="34" charset="0"/>
-        <a:buChar char="•"/>
-        <a:defRPr sz="2400" kern="1200">
-          <a:solidFill>
-            <a:schemeClr val="tx1"/>
-          </a:solidFill>
-          <a:latin typeface="+mn-lt"/>
-          <a:ea typeface="+mn-ea"/>
-          <a:cs typeface="+mn-cs"/>
-        </a:defRPr>
-      </a:lvl3pPr>
-      <a:lvl4pPr marL="1600200" indent="-228600" algn="l" defTabSz="914400" rtl="0" eaLnBrk="1" latinLnBrk="0" hangingPunct="1">
-        <a:spcBef>
-          <a:spcPct val="20000"/>
-        </a:spcBef>
-        <a:buFont typeface="Arial" pitchFamily="34" charset="0"/>
-        <a:buChar char="–"/>
         <a:defRPr sz="2000" kern="1200">
           <a:solidFill>
             <a:schemeClr val="tx1"/>
           </a:solidFill>
-          <a:latin typeface="+mn-lt"/>
-          <a:ea typeface="+mn-ea"/>
-          <a:cs typeface="+mn-cs"/>
+          <a:latin typeface="Calibri" panose="020F0502020204030204" pitchFamily="34" charset="0"/>
+          <a:ea typeface="Calibri" panose="020F0502020204030204" pitchFamily="34" charset="0"/>
+          <a:cs typeface="Calibri" panose="020F0502020204030204" pitchFamily="34" charset="0"/>
+        </a:defRPr>
+      </a:lvl1pPr>
+      <a:lvl2pPr marL="685800" indent="-228600" algn="l" defTabSz="914400" rtl="0" eaLnBrk="1" latinLnBrk="0" hangingPunct="1">
+        <a:lnSpc>
+          <a:spcPct val="90000"/>
+        </a:lnSpc>
+        <a:spcBef>
+          <a:spcPts val="500"/>
+        </a:spcBef>
+        <a:buFont typeface="Arial" panose="020B0604020202020204" pitchFamily="34" charset="0"/>
+        <a:buChar char="•"/>
+        <a:defRPr sz="1800" kern="1200">
+          <a:solidFill>
+            <a:schemeClr val="tx1"/>
+          </a:solidFill>
+          <a:latin typeface="Calibri" panose="020F0502020204030204" pitchFamily="34" charset="0"/>
+          <a:ea typeface="Calibri" panose="020F0502020204030204" pitchFamily="34" charset="0"/>
+          <a:cs typeface="Calibri" panose="020F0502020204030204" pitchFamily="34" charset="0"/>
+        </a:defRPr>
+      </a:lvl2pPr>
+      <a:lvl3pPr marL="1143000" indent="-228600" algn="l" defTabSz="914400" rtl="0" eaLnBrk="1" latinLnBrk="0" hangingPunct="1">
+        <a:lnSpc>
+          <a:spcPct val="90000"/>
+        </a:lnSpc>
+        <a:spcBef>
+          <a:spcPts val="500"/>
+        </a:spcBef>
+        <a:buFont typeface="Arial" panose="020B0604020202020204" pitchFamily="34" charset="0"/>
+        <a:buChar char="•"/>
+        <a:defRPr sz="1600" kern="1200">
+          <a:solidFill>
+            <a:schemeClr val="tx1"/>
+          </a:solidFill>
+          <a:latin typeface="Calibri" panose="020F0502020204030204" pitchFamily="34" charset="0"/>
+          <a:ea typeface="Calibri" panose="020F0502020204030204" pitchFamily="34" charset="0"/>
+          <a:cs typeface="Calibri" panose="020F0502020204030204" pitchFamily="34" charset="0"/>
+        </a:defRPr>
+      </a:lvl3pPr>
+      <a:lvl4pPr marL="1600200" indent="-228600" algn="l" defTabSz="914400" rtl="0" eaLnBrk="1" latinLnBrk="0" hangingPunct="1">
+        <a:lnSpc>
+          <a:spcPct val="90000"/>
+        </a:lnSpc>
+        <a:spcBef>
+          <a:spcPts val="500"/>
+        </a:spcBef>
+        <a:buFont typeface="Arial" panose="020B0604020202020204" pitchFamily="34" charset="0"/>
+        <a:buChar char="•"/>
+        <a:defRPr sz="1600" kern="1200">
+          <a:solidFill>
+            <a:schemeClr val="tx1"/>
+          </a:solidFill>
+          <a:latin typeface="Calibri" panose="020F0502020204030204" pitchFamily="34" charset="0"/>
+          <a:ea typeface="Calibri" panose="020F0502020204030204" pitchFamily="34" charset="0"/>
+          <a:cs typeface="Calibri" panose="020F0502020204030204" pitchFamily="34" charset="0"/>
         </a:defRPr>
       </a:lvl4pPr>
       <a:lvl5pPr marL="2057400" indent="-228600" algn="l" defTabSz="914400" rtl="0" eaLnBrk="1" latinLnBrk="0" hangingPunct="1">
+        <a:lnSpc>
+          <a:spcPct val="90000"/>
+        </a:lnSpc>
         <a:spcBef>
-          <a:spcPct val="20000"/>
+          <a:spcPts val="500"/>
         </a:spcBef>
-        <a:buFont typeface="Arial" pitchFamily="34" charset="0"/>
-        <a:buChar char="»"/>
-        <a:defRPr sz="2000" kern="1200">
+        <a:buFont typeface="Arial" panose="020B0604020202020204" pitchFamily="34" charset="0"/>
+        <a:buChar char="•"/>
+        <a:defRPr sz="1600" kern="1200">
           <a:solidFill>
             <a:schemeClr val="tx1"/>
           </a:solidFill>
-          <a:latin typeface="+mn-lt"/>
-          <a:ea typeface="+mn-ea"/>
-          <a:cs typeface="+mn-cs"/>
+          <a:latin typeface="Calibri" panose="020F0502020204030204" pitchFamily="34" charset="0"/>
+          <a:ea typeface="Calibri" panose="020F0502020204030204" pitchFamily="34" charset="0"/>
+          <a:cs typeface="Calibri" panose="020F0502020204030204" pitchFamily="34" charset="0"/>
         </a:defRPr>
       </a:lvl5pPr>
       <a:lvl6pPr marL="2514600" indent="-228600" algn="l" defTabSz="914400" rtl="0" eaLnBrk="1" latinLnBrk="0" hangingPunct="1">
+        <a:lnSpc>
+          <a:spcPct val="90000"/>
+        </a:lnSpc>
         <a:spcBef>
-          <a:spcPct val="20000"/>
+          <a:spcPts val="500"/>
         </a:spcBef>
-        <a:buFont typeface="Arial" pitchFamily="34" charset="0"/>
+        <a:buFont typeface="Arial" panose="020B0604020202020204" pitchFamily="34" charset="0"/>
         <a:buChar char="•"/>
-        <a:defRPr sz="2000" kern="1200">
+        <a:defRPr sz="1800" kern="1200">
           <a:solidFill>
             <a:schemeClr val="tx1"/>
           </a:solidFill>
@@ -885,12 +1640,15 @@
         </a:defRPr>
       </a:lvl6pPr>
       <a:lvl7pPr marL="2971800" indent="-228600" algn="l" defTabSz="914400" rtl="0" eaLnBrk="1" latinLnBrk="0" hangingPunct="1">
+        <a:lnSpc>
+          <a:spcPct val="90000"/>
+        </a:lnSpc>
         <a:spcBef>
-          <a:spcPct val="20000"/>
+          <a:spcPts val="500"/>
         </a:spcBef>
-        <a:buFont typeface="Arial" pitchFamily="34" charset="0"/>
+        <a:buFont typeface="Arial" panose="020B0604020202020204" pitchFamily="34" charset="0"/>
         <a:buChar char="•"/>
-        <a:defRPr sz="2000" kern="1200">
+        <a:defRPr sz="1800" kern="1200">
           <a:solidFill>
             <a:schemeClr val="tx1"/>
           </a:solidFill>
@@ -900,12 +1658,15 @@
         </a:defRPr>
       </a:lvl7pPr>
       <a:lvl8pPr marL="3429000" indent="-228600" algn="l" defTabSz="914400" rtl="0" eaLnBrk="1" latinLnBrk="0" hangingPunct="1">
+        <a:lnSpc>
+          <a:spcPct val="90000"/>
+        </a:lnSpc>
         <a:spcBef>
-          <a:spcPct val="20000"/>
+          <a:spcPts val="500"/>
         </a:spcBef>
-        <a:buFont typeface="Arial" pitchFamily="34" charset="0"/>
+        <a:buFont typeface="Arial" panose="020B0604020202020204" pitchFamily="34" charset="0"/>
         <a:buChar char="•"/>
-        <a:defRPr sz="2000" kern="1200">
+        <a:defRPr sz="1800" kern="1200">
           <a:solidFill>
             <a:schemeClr val="tx1"/>
           </a:solidFill>
@@ -915,12 +1676,15 @@
         </a:defRPr>
       </a:lvl8pPr>
       <a:lvl9pPr marL="3886200" indent="-228600" algn="l" defTabSz="914400" rtl="0" eaLnBrk="1" latinLnBrk="0" hangingPunct="1">
+        <a:lnSpc>
+          <a:spcPct val="90000"/>
+        </a:lnSpc>
         <a:spcBef>
-          <a:spcPct val="20000"/>
+          <a:spcPts val="500"/>
         </a:spcBef>
-        <a:buFont typeface="Arial" pitchFamily="34" charset="0"/>
+        <a:buFont typeface="Arial" panose="020B0604020202020204" pitchFamily="34" charset="0"/>
         <a:buChar char="•"/>
-        <a:defRPr sz="2000" kern="1200">
+        <a:defRPr sz="1800" kern="1200">
           <a:solidFill>
             <a:schemeClr val="tx1"/>
           </a:solidFill>
@@ -932,7 +1696,7 @@
     </p:bodyStyle>
     <p:otherStyle>
       <a:defPPr>
-        <a:defRPr lang="en-US"/>
+        <a:defRPr lang="en-SE"/>
       </a:defPPr>
       <a:lvl1pPr marL="0" algn="l" defTabSz="914400" rtl="0" eaLnBrk="1" latinLnBrk="0" hangingPunct="1">
         <a:defRPr sz="1800" kern="1200">
@@ -1037,6 +1801,7 @@
         <a:solidFill>
           <a:srgbClr val="FFFFFF"/>
         </a:solidFill>
+        <a:effectLst/>
       </p:bgPr>
     </p:bg>
     <p:spTree>
@@ -1055,55 +1820,7 @@
       </p:grpSpPr>
       <p:pic>
         <p:nvPicPr>
-          <p:cNvPr id="2" name="Image 0" descr="fraunhofer.png">    </p:cNvPr>
-          <p:cNvPicPr>
-            <a:picLocks noChangeAspect="1"/>
-          </p:cNvPicPr>
-          <p:nvPr/>
-        </p:nvPicPr>
-        <p:blipFill>
-          <a:blip r:embed="rId1"/>
-          <a:stretch>
-            <a:fillRect/>
-          </a:stretch>
-        </p:blipFill>
-        <p:spPr>
-          <a:xfrm>
-            <a:off x="679788" y="237744"/>
-            <a:ext cx="1475065" cy="420624"/>
-          </a:xfrm>
-          <a:prstGeom prst="rect">
-            <a:avLst/>
-          </a:prstGeom>
-        </p:spPr>
-      </p:pic>
-      <p:pic>
-        <p:nvPicPr>
-          <p:cNvPr id="3" name="Image 1" descr="chalmers.png">    </p:cNvPr>
-          <p:cNvPicPr>
-            <a:picLocks noChangeAspect="1"/>
-          </p:cNvPicPr>
-          <p:nvPr/>
-        </p:nvPicPr>
-        <p:blipFill>
-          <a:blip r:embed="rId2"/>
-          <a:stretch>
-            <a:fillRect/>
-          </a:stretch>
-        </p:blipFill>
-        <p:spPr>
-          <a:xfrm>
-            <a:off x="2843479" y="237744"/>
-            <a:ext cx="1353922" cy="420624"/>
-          </a:xfrm>
-          <a:prstGeom prst="rect">
-            <a:avLst/>
-          </a:prstGeom>
-        </p:spPr>
-      </p:pic>
-      <p:pic>
-        <p:nvPicPr>
-          <p:cNvPr id="4" name="Image 2" descr="goteborg.png">    </p:cNvPr>
+          <p:cNvPr id="2" name="Image 0" descr="fraunhofer.png"/>
           <p:cNvPicPr>
             <a:picLocks noChangeAspect="1"/>
           </p:cNvPicPr>
@@ -1117,8 +1834,8 @@
         </p:blipFill>
         <p:spPr>
           <a:xfrm>
-            <a:off x="4881282" y="195682"/>
-            <a:ext cx="1484555" cy="504749"/>
+            <a:off x="679788" y="237744"/>
+            <a:ext cx="1475065" cy="420624"/>
           </a:xfrm>
           <a:prstGeom prst="rect">
             <a:avLst/>
@@ -1127,7 +1844,7 @@
       </p:pic>
       <p:pic>
         <p:nvPicPr>
-          <p:cNvPr id="5" name="Image 3" descr="napoli.png">    </p:cNvPr>
+          <p:cNvPr id="3" name="Image 1" descr="chalmers.png"/>
           <p:cNvPicPr>
             <a:picLocks noChangeAspect="1"/>
           </p:cNvPicPr>
@@ -1141,6 +1858,54 @@
         </p:blipFill>
         <p:spPr>
           <a:xfrm>
+            <a:off x="2843479" y="237744"/>
+            <a:ext cx="1353922" cy="420624"/>
+          </a:xfrm>
+          <a:prstGeom prst="rect">
+            <a:avLst/>
+          </a:prstGeom>
+        </p:spPr>
+      </p:pic>
+      <p:pic>
+        <p:nvPicPr>
+          <p:cNvPr id="4" name="Image 2" descr="goteborg.png"/>
+          <p:cNvPicPr>
+            <a:picLocks noChangeAspect="1"/>
+          </p:cNvPicPr>
+          <p:nvPr/>
+        </p:nvPicPr>
+        <p:blipFill>
+          <a:blip r:embed="rId5"/>
+          <a:stretch>
+            <a:fillRect/>
+          </a:stretch>
+        </p:blipFill>
+        <p:spPr>
+          <a:xfrm>
+            <a:off x="4881282" y="195682"/>
+            <a:ext cx="1484555" cy="504749"/>
+          </a:xfrm>
+          <a:prstGeom prst="rect">
+            <a:avLst/>
+          </a:prstGeom>
+        </p:spPr>
+      </p:pic>
+      <p:pic>
+        <p:nvPicPr>
+          <p:cNvPr id="5" name="Image 3" descr="napoli.png"/>
+          <p:cNvPicPr>
+            <a:picLocks noChangeAspect="1"/>
+          </p:cNvPicPr>
+          <p:nvPr/>
+        </p:nvPicPr>
+        <p:blipFill>
+          <a:blip r:embed="rId6"/>
+          <a:stretch>
+            <a:fillRect/>
+          </a:stretch>
+        </p:blipFill>
+        <p:spPr>
+          <a:xfrm>
             <a:off x="7077887" y="237744"/>
             <a:ext cx="1297585" cy="420624"/>
           </a:xfrm>
@@ -1170,7 +1935,7 @@
           <a:bodyPr wrap="square" lIns="0" tIns="0" rIns="0" bIns="0" rtlCol="0" anchor="ctr"/>
           <a:lstStyle/>
           <a:p>
-            <a:pPr algn="ctr" indent="0" marL="0">
+            <a:pPr marL="0" indent="0" algn="ctr">
               <a:lnSpc>
                 <a:spcPct val="105000"/>
               </a:lnSpc>
@@ -1212,7 +1977,7 @@
           <a:bodyPr wrap="square" lIns="0" tIns="0" rIns="0" bIns="0" rtlCol="0" anchor="ctr"/>
           <a:lstStyle/>
           <a:p>
-            <a:pPr algn="ctr" indent="0" marL="0">
+            <a:pPr marL="0" indent="0" algn="ctr">
               <a:buNone/>
             </a:pPr>
             <a:r>
@@ -1251,7 +2016,7 @@
           <a:bodyPr wrap="square" lIns="0" tIns="0" rIns="0" bIns="0" rtlCol="0" anchor="ctr"/>
           <a:lstStyle/>
           <a:p>
-            <a:pPr algn="ctr" indent="0" marL="0">
+            <a:pPr marL="0" indent="0" algn="ctr">
               <a:buNone/>
             </a:pPr>
             <a:r>
@@ -1271,45 +2036,6 @@
       </p:sp>
       <p:sp>
         <p:nvSpPr>
-          <p:cNvPr id="9" name="Text 3"/>
-          <p:cNvSpPr/>
-          <p:nvPr/>
-        </p:nvSpPr>
-        <p:spPr>
-          <a:xfrm>
-            <a:off x="365760" y="4736592"/>
-            <a:ext cx="3840480" cy="274320"/>
-          </a:xfrm>
-          <a:prstGeom prst="rect">
-            <a:avLst/>
-          </a:prstGeom>
-          <a:noFill/>
-          <a:ln/>
-        </p:spPr>
-        <p:txBody>
-          <a:bodyPr wrap="square" lIns="0" tIns="0" rIns="0" bIns="0" rtlCol="0" anchor="ctr"/>
-          <a:lstStyle/>
-          <a:p>
-            <a:pPr algn="l" indent="0" marL="0">
-              <a:buNone/>
-            </a:pPr>
-            <a:r>
-              <a:rPr lang="en-US" sz="900" dirty="0">
-                <a:solidFill>
-                  <a:srgbClr val="7A8794"/>
-                </a:solidFill>
-                <a:latin typeface="Calibri" pitchFamily="34" charset="0"/>
-                <a:ea typeface="Calibri" pitchFamily="34" charset="-122"/>
-                <a:cs typeface="Calibri" pitchFamily="34" charset="-120"/>
-              </a:rPr>
-              <a:t>FSE 2026  ·  Montréal  ·  5–9 July 2026</a:t>
-            </a:r>
-            <a:endParaRPr lang="en-US" sz="900" dirty="0"/>
-          </a:p>
-        </p:txBody>
-      </p:sp>
-      <p:sp>
-        <p:nvSpPr>
           <p:cNvPr id="10" name="Text 4"/>
           <p:cNvSpPr/>
           <p:nvPr/>
@@ -1329,48 +2055,9 @@
           <a:bodyPr wrap="square" lIns="0" tIns="0" rIns="0" bIns="0" rtlCol="0" anchor="ctr"/>
           <a:lstStyle/>
           <a:p>
-            <a:pPr algn="ctr" indent="0" marL="0">
+            <a:pPr marL="0" indent="0" algn="ctr">
               <a:buNone/>
             </a:pPr>
-            <a:endParaRPr lang="en-US" sz="900" dirty="0"/>
-          </a:p>
-        </p:txBody>
-      </p:sp>
-      <p:sp>
-        <p:nvSpPr>
-          <p:cNvPr id="11" name="Text 5"/>
-          <p:cNvSpPr/>
-          <p:nvPr/>
-        </p:nvSpPr>
-        <p:spPr>
-          <a:xfrm>
-            <a:off x="7863840" y="4736592"/>
-            <a:ext cx="914400" cy="274320"/>
-          </a:xfrm>
-          <a:prstGeom prst="rect">
-            <a:avLst/>
-          </a:prstGeom>
-          <a:noFill/>
-          <a:ln/>
-        </p:spPr>
-        <p:txBody>
-          <a:bodyPr wrap="square" lIns="0" tIns="0" rIns="0" bIns="0" rtlCol="0" anchor="ctr"/>
-          <a:lstStyle/>
-          <a:p>
-            <a:pPr algn="r" indent="0" marL="0">
-              <a:buNone/>
-            </a:pPr>
-            <a:r>
-              <a:rPr lang="en-US" sz="900" dirty="0">
-                <a:solidFill>
-                  <a:srgbClr val="7A8794"/>
-                </a:solidFill>
-                <a:latin typeface="Calibri" pitchFamily="34" charset="0"/>
-                <a:ea typeface="Calibri" pitchFamily="34" charset="-122"/>
-                <a:cs typeface="Calibri" pitchFamily="34" charset="-120"/>
-              </a:rPr>
-              <a:t>1</a:t>
-            </a:r>
             <a:endParaRPr lang="en-US" sz="900" dirty="0"/>
           </a:p>
         </p:txBody>
@@ -1391,6 +2078,7 @@
         <a:solidFill>
           <a:srgbClr val="FFFFFF"/>
         </a:solidFill>
+        <a:effectLst/>
       </p:bgPr>
     </p:bg>
     <p:spTree>
@@ -1409,55 +2097,7 @@
       </p:grpSpPr>
       <p:pic>
         <p:nvPicPr>
-          <p:cNvPr id="2" name="Image 0" descr="fraunhofer.png">    </p:cNvPr>
-          <p:cNvPicPr>
-            <a:picLocks noChangeAspect="1"/>
-          </p:cNvPicPr>
-          <p:nvPr/>
-        </p:nvPicPr>
-        <p:blipFill>
-          <a:blip r:embed="rId1"/>
-          <a:stretch>
-            <a:fillRect/>
-          </a:stretch>
-        </p:blipFill>
-        <p:spPr>
-          <a:xfrm>
-            <a:off x="679788" y="237744"/>
-            <a:ext cx="1475065" cy="420624"/>
-          </a:xfrm>
-          <a:prstGeom prst="rect">
-            <a:avLst/>
-          </a:prstGeom>
-        </p:spPr>
-      </p:pic>
-      <p:pic>
-        <p:nvPicPr>
-          <p:cNvPr id="3" name="Image 1" descr="chalmers.png">    </p:cNvPr>
-          <p:cNvPicPr>
-            <a:picLocks noChangeAspect="1"/>
-          </p:cNvPicPr>
-          <p:nvPr/>
-        </p:nvPicPr>
-        <p:blipFill>
-          <a:blip r:embed="rId2"/>
-          <a:stretch>
-            <a:fillRect/>
-          </a:stretch>
-        </p:blipFill>
-        <p:spPr>
-          <a:xfrm>
-            <a:off x="2843479" y="237744"/>
-            <a:ext cx="1353922" cy="420624"/>
-          </a:xfrm>
-          <a:prstGeom prst="rect">
-            <a:avLst/>
-          </a:prstGeom>
-        </p:spPr>
-      </p:pic>
-      <p:pic>
-        <p:nvPicPr>
-          <p:cNvPr id="4" name="Image 2" descr="goteborg.png">    </p:cNvPr>
+          <p:cNvPr id="2" name="Image 0" descr="fraunhofer.png"/>
           <p:cNvPicPr>
             <a:picLocks noChangeAspect="1"/>
           </p:cNvPicPr>
@@ -1471,8 +2111,8 @@
         </p:blipFill>
         <p:spPr>
           <a:xfrm>
-            <a:off x="4881282" y="195682"/>
-            <a:ext cx="1484555" cy="504749"/>
+            <a:off x="679788" y="237744"/>
+            <a:ext cx="1475065" cy="420624"/>
           </a:xfrm>
           <a:prstGeom prst="rect">
             <a:avLst/>
@@ -1481,7 +2121,7 @@
       </p:pic>
       <p:pic>
         <p:nvPicPr>
-          <p:cNvPr id="5" name="Image 3" descr="napoli.png">    </p:cNvPr>
+          <p:cNvPr id="3" name="Image 1" descr="chalmers.png"/>
           <p:cNvPicPr>
             <a:picLocks noChangeAspect="1"/>
           </p:cNvPicPr>
@@ -1495,6 +2135,54 @@
         </p:blipFill>
         <p:spPr>
           <a:xfrm>
+            <a:off x="2843479" y="237744"/>
+            <a:ext cx="1353922" cy="420624"/>
+          </a:xfrm>
+          <a:prstGeom prst="rect">
+            <a:avLst/>
+          </a:prstGeom>
+        </p:spPr>
+      </p:pic>
+      <p:pic>
+        <p:nvPicPr>
+          <p:cNvPr id="4" name="Image 2" descr="goteborg.png"/>
+          <p:cNvPicPr>
+            <a:picLocks noChangeAspect="1"/>
+          </p:cNvPicPr>
+          <p:nvPr/>
+        </p:nvPicPr>
+        <p:blipFill>
+          <a:blip r:embed="rId5"/>
+          <a:stretch>
+            <a:fillRect/>
+          </a:stretch>
+        </p:blipFill>
+        <p:spPr>
+          <a:xfrm>
+            <a:off x="4881282" y="195682"/>
+            <a:ext cx="1484555" cy="504749"/>
+          </a:xfrm>
+          <a:prstGeom prst="rect">
+            <a:avLst/>
+          </a:prstGeom>
+        </p:spPr>
+      </p:pic>
+      <p:pic>
+        <p:nvPicPr>
+          <p:cNvPr id="5" name="Image 3" descr="napoli.png"/>
+          <p:cNvPicPr>
+            <a:picLocks noChangeAspect="1"/>
+          </p:cNvPicPr>
+          <p:nvPr/>
+        </p:nvPicPr>
+        <p:blipFill>
+          <a:blip r:embed="rId6"/>
+          <a:stretch>
+            <a:fillRect/>
+          </a:stretch>
+        </p:blipFill>
+        <p:spPr>
+          <a:xfrm>
             <a:off x="7077887" y="237744"/>
             <a:ext cx="1297585" cy="420624"/>
           </a:xfrm>
@@ -1524,11 +2212,11 @@
           <a:bodyPr wrap="square" lIns="0" tIns="0" rIns="0" bIns="0" rtlCol="0" anchor="ctr"/>
           <a:lstStyle/>
           <a:p>
-            <a:pPr algn="ctr" indent="0" marL="0">
+            <a:pPr marL="0" indent="0" algn="ctr">
               <a:buNone/>
             </a:pPr>
             <a:r>
-              <a:rPr lang="en-US" sz="1400" spc="200" kern="0" dirty="0">
+              <a:rPr lang="en-US" sz="1400" kern="0" spc="200" dirty="0">
                 <a:solidFill>
                   <a:srgbClr val="7A8794"/>
                 </a:solidFill>
@@ -1563,7 +2251,7 @@
           <a:bodyPr wrap="square" lIns="0" tIns="0" rIns="0" bIns="0" rtlCol="0" anchor="ctr"/>
           <a:lstStyle/>
           <a:p>
-            <a:pPr algn="ctr" indent="0" marL="0">
+            <a:pPr marL="0" indent="0" algn="ctr">
               <a:buNone/>
             </a:pPr>
             <a:r>
@@ -1583,45 +2271,6 @@
       </p:sp>
       <p:sp>
         <p:nvSpPr>
-          <p:cNvPr id="8" name="Text 2"/>
-          <p:cNvSpPr/>
-          <p:nvPr/>
-        </p:nvSpPr>
-        <p:spPr>
-          <a:xfrm>
-            <a:off x="365760" y="4736592"/>
-            <a:ext cx="3840480" cy="274320"/>
-          </a:xfrm>
-          <a:prstGeom prst="rect">
-            <a:avLst/>
-          </a:prstGeom>
-          <a:noFill/>
-          <a:ln/>
-        </p:spPr>
-        <p:txBody>
-          <a:bodyPr wrap="square" lIns="0" tIns="0" rIns="0" bIns="0" rtlCol="0" anchor="ctr"/>
-          <a:lstStyle/>
-          <a:p>
-            <a:pPr algn="l" indent="0" marL="0">
-              <a:buNone/>
-            </a:pPr>
-            <a:r>
-              <a:rPr lang="en-US" sz="900" dirty="0">
-                <a:solidFill>
-                  <a:srgbClr val="7A8794"/>
-                </a:solidFill>
-                <a:latin typeface="Calibri" pitchFamily="34" charset="0"/>
-                <a:ea typeface="Calibri" pitchFamily="34" charset="-122"/>
-                <a:cs typeface="Calibri" pitchFamily="34" charset="-120"/>
-              </a:rPr>
-              <a:t>FSE 2026  ·  Montréal  ·  5–9 July 2026</a:t>
-            </a:r>
-            <a:endParaRPr lang="en-US" sz="900" dirty="0"/>
-          </a:p>
-        </p:txBody>
-      </p:sp>
-      <p:sp>
-        <p:nvSpPr>
           <p:cNvPr id="9" name="Text 3"/>
           <p:cNvSpPr/>
           <p:nvPr/>
@@ -1641,7 +2290,7 @@
           <a:bodyPr wrap="square" lIns="0" tIns="0" rIns="0" bIns="0" rtlCol="0" anchor="ctr"/>
           <a:lstStyle/>
           <a:p>
-            <a:pPr algn="ctr" indent="0" marL="0">
+            <a:pPr marL="0" indent="0" algn="ctr">
               <a:buNone/>
             </a:pPr>
             <a:r>
@@ -1661,40 +2310,137 @@
       </p:sp>
       <p:sp>
         <p:nvSpPr>
-          <p:cNvPr id="10" name="Text 4"/>
-          <p:cNvSpPr/>
+          <p:cNvPr id="11" name="Platshållare för bildnummer 3">
+            <a:extLst>
+              <a:ext uri="{FF2B5EF4-FFF2-40B4-BE49-F238E27FC236}">
+                <a16:creationId xmlns:a16="http://schemas.microsoft.com/office/drawing/2014/main" id="{68F2C0D3-8C44-0F80-B696-C3F5B6BCA0FA}"/>
+              </a:ext>
+            </a:extLst>
+          </p:cNvPr>
+          <p:cNvSpPr txBox="1">
+            <a:spLocks/>
+          </p:cNvSpPr>
           <p:nvPr/>
         </p:nvSpPr>
         <p:spPr>
           <a:xfrm>
-            <a:off x="7863840" y="4736592"/>
-            <a:ext cx="914400" cy="274320"/>
-          </a:xfrm>
-          <a:prstGeom prst="rect">
-            <a:avLst/>
-          </a:prstGeom>
-          <a:noFill/>
-          <a:ln/>
-        </p:spPr>
-        <p:txBody>
-          <a:bodyPr wrap="square" lIns="0" tIns="0" rIns="0" bIns="0" rtlCol="0" anchor="ctr"/>
-          <a:lstStyle/>
-          <a:p>
-            <a:pPr algn="r" indent="0" marL="0">
-              <a:buNone/>
-            </a:pPr>
-            <a:r>
-              <a:rPr lang="en-US" sz="900" dirty="0">
+            <a:off x="6150142" y="4767262"/>
+            <a:ext cx="2831432" cy="274637"/>
+          </a:xfrm>
+          <a:prstGeom prst="rect">
+            <a:avLst/>
+          </a:prstGeom>
+        </p:spPr>
+        <p:txBody>
+          <a:bodyPr/>
+          <a:lstStyle>
+            <a:lvl1pPr marL="0" algn="l" defTabSz="914400" rtl="0" eaLnBrk="1" latinLnBrk="0" hangingPunct="1">
+              <a:defRPr sz="1800" kern="1200">
                 <a:solidFill>
-                  <a:srgbClr val="7A8794"/>
+                  <a:schemeClr val="tx1"/>
                 </a:solidFill>
-                <a:latin typeface="Calibri" pitchFamily="34" charset="0"/>
-                <a:ea typeface="Calibri" pitchFamily="34" charset="-122"/>
-                <a:cs typeface="Calibri" pitchFamily="34" charset="-120"/>
+                <a:latin typeface="Calibri" panose="020F0502020204030204" pitchFamily="34" charset="0"/>
+                <a:ea typeface="Calibri" panose="020F0502020204030204" pitchFamily="34" charset="0"/>
+                <a:cs typeface="Calibri" panose="020F0502020204030204" pitchFamily="34" charset="0"/>
+              </a:defRPr>
+            </a:lvl1pPr>
+            <a:lvl2pPr marL="457200" algn="l" defTabSz="914400" rtl="0" eaLnBrk="1" latinLnBrk="0" hangingPunct="1">
+              <a:defRPr sz="1800" kern="1200">
+                <a:solidFill>
+                  <a:schemeClr val="tx1"/>
+                </a:solidFill>
+                <a:latin typeface="+mn-lt"/>
+                <a:ea typeface="+mn-ea"/>
+                <a:cs typeface="+mn-cs"/>
+              </a:defRPr>
+            </a:lvl2pPr>
+            <a:lvl3pPr marL="914400" algn="l" defTabSz="914400" rtl="0" eaLnBrk="1" latinLnBrk="0" hangingPunct="1">
+              <a:defRPr sz="1800" kern="1200">
+                <a:solidFill>
+                  <a:schemeClr val="tx1"/>
+                </a:solidFill>
+                <a:latin typeface="+mn-lt"/>
+                <a:ea typeface="+mn-ea"/>
+                <a:cs typeface="+mn-cs"/>
+              </a:defRPr>
+            </a:lvl3pPr>
+            <a:lvl4pPr marL="1371600" algn="l" defTabSz="914400" rtl="0" eaLnBrk="1" latinLnBrk="0" hangingPunct="1">
+              <a:defRPr sz="1800" kern="1200">
+                <a:solidFill>
+                  <a:schemeClr val="tx1"/>
+                </a:solidFill>
+                <a:latin typeface="+mn-lt"/>
+                <a:ea typeface="+mn-ea"/>
+                <a:cs typeface="+mn-cs"/>
+              </a:defRPr>
+            </a:lvl4pPr>
+            <a:lvl5pPr marL="1828800" algn="l" defTabSz="914400" rtl="0" eaLnBrk="1" latinLnBrk="0" hangingPunct="1">
+              <a:defRPr sz="1800" kern="1200">
+                <a:solidFill>
+                  <a:schemeClr val="tx1"/>
+                </a:solidFill>
+                <a:latin typeface="+mn-lt"/>
+                <a:ea typeface="+mn-ea"/>
+                <a:cs typeface="+mn-cs"/>
+              </a:defRPr>
+            </a:lvl5pPr>
+            <a:lvl6pPr marL="2286000" algn="l" defTabSz="914400" rtl="0" eaLnBrk="1" latinLnBrk="0" hangingPunct="1">
+              <a:defRPr sz="1800" kern="1200">
+                <a:solidFill>
+                  <a:schemeClr val="tx1"/>
+                </a:solidFill>
+                <a:latin typeface="+mn-lt"/>
+                <a:ea typeface="+mn-ea"/>
+                <a:cs typeface="+mn-cs"/>
+              </a:defRPr>
+            </a:lvl6pPr>
+            <a:lvl7pPr marL="2743200" algn="l" defTabSz="914400" rtl="0" eaLnBrk="1" latinLnBrk="0" hangingPunct="1">
+              <a:defRPr sz="1800" kern="1200">
+                <a:solidFill>
+                  <a:schemeClr val="tx1"/>
+                </a:solidFill>
+                <a:latin typeface="+mn-lt"/>
+                <a:ea typeface="+mn-ea"/>
+                <a:cs typeface="+mn-cs"/>
+              </a:defRPr>
+            </a:lvl7pPr>
+            <a:lvl8pPr marL="3200400" algn="l" defTabSz="914400" rtl="0" eaLnBrk="1" latinLnBrk="0" hangingPunct="1">
+              <a:defRPr sz="1800" kern="1200">
+                <a:solidFill>
+                  <a:schemeClr val="tx1"/>
+                </a:solidFill>
+                <a:latin typeface="+mn-lt"/>
+                <a:ea typeface="+mn-ea"/>
+                <a:cs typeface="+mn-cs"/>
+              </a:defRPr>
+            </a:lvl8pPr>
+            <a:lvl9pPr marL="3657600" algn="l" defTabSz="914400" rtl="0" eaLnBrk="1" latinLnBrk="0" hangingPunct="1">
+              <a:defRPr sz="1800" kern="1200">
+                <a:solidFill>
+                  <a:schemeClr val="tx1"/>
+                </a:solidFill>
+                <a:latin typeface="+mn-lt"/>
+                <a:ea typeface="+mn-ea"/>
+                <a:cs typeface="+mn-cs"/>
+              </a:defRPr>
+            </a:lvl9pPr>
+          </a:lstStyle>
+          <a:p>
+            <a:pPr algn="r"/>
+            <a:fld id="{C53FA84E-D7EA-43A2-AD8F-825F36F0800C}" type="slidenum">
+              <a:rPr lang="en-SE" sz="900" smtClean="0">
+                <a:solidFill>
+                  <a:srgbClr val="1E3A5F"/>
+                </a:solidFill>
               </a:rPr>
+              <a:pPr algn="r"/>
               <a:t>2</a:t>
-            </a:r>
-            <a:endParaRPr lang="en-US" sz="900" dirty="0"/>
+            </a:fld>
+            <a:endParaRPr lang="en-SE" sz="900" dirty="0">
+              <a:solidFill>
+                <a:srgbClr val="1E3A5F"/>
+              </a:solidFill>
+            </a:endParaRPr>
           </a:p>
         </p:txBody>
       </p:sp>
@@ -1708,14 +2454,7 @@
 
 <file path=ppt/slides/slide3.xml><?xml version="1.0" encoding="utf-8"?>
 <p:sld xmlns:a="http://schemas.openxmlformats.org/drawingml/2006/main" xmlns:r="http://schemas.openxmlformats.org/officeDocument/2006/relationships" xmlns:p="http://schemas.openxmlformats.org/presentationml/2006/main">
-  <p:cSld name="Slide 3">
-    <p:bg>
-      <p:bgPr>
-        <a:solidFill>
-          <a:srgbClr val="FFFFFF"/>
-        </a:solidFill>
-      </p:bgPr>
-    </p:bg>
+  <p:cSld>
     <p:spTree>
       <p:nvGrpSpPr>
         <p:cNvPr id="1" name=""/>
@@ -1730,365 +2469,118 @@
           <a:chExt cx="0" cy="0"/>
         </a:xfrm>
       </p:grpSpPr>
-      <p:pic>
-        <p:nvPicPr>
-          <p:cNvPr id="2" name="Image 0" descr="fraunhofer.png">    </p:cNvPr>
-          <p:cNvPicPr>
-            <a:picLocks noChangeAspect="1"/>
-          </p:cNvPicPr>
-          <p:nvPr/>
-        </p:nvPicPr>
-        <p:blipFill>
-          <a:blip r:embed="rId1"/>
-          <a:stretch>
-            <a:fillRect/>
-          </a:stretch>
-        </p:blipFill>
-        <p:spPr>
-          <a:xfrm>
-            <a:off x="679788" y="237744"/>
-            <a:ext cx="1475065" cy="420624"/>
-          </a:xfrm>
-          <a:prstGeom prst="rect">
-            <a:avLst/>
-          </a:prstGeom>
-        </p:spPr>
-      </p:pic>
-      <p:pic>
-        <p:nvPicPr>
-          <p:cNvPr id="3" name="Image 1" descr="chalmers.png">    </p:cNvPr>
-          <p:cNvPicPr>
-            <a:picLocks noChangeAspect="1"/>
-          </p:cNvPicPr>
-          <p:nvPr/>
-        </p:nvPicPr>
-        <p:blipFill>
-          <a:blip r:embed="rId2"/>
-          <a:stretch>
-            <a:fillRect/>
-          </a:stretch>
-        </p:blipFill>
-        <p:spPr>
-          <a:xfrm>
-            <a:off x="2843479" y="237744"/>
-            <a:ext cx="1353922" cy="420624"/>
-          </a:xfrm>
-          <a:prstGeom prst="rect">
-            <a:avLst/>
-          </a:prstGeom>
-        </p:spPr>
-      </p:pic>
-      <p:pic>
-        <p:nvPicPr>
-          <p:cNvPr id="4" name="Image 2" descr="goteborg.png">    </p:cNvPr>
-          <p:cNvPicPr>
-            <a:picLocks noChangeAspect="1"/>
-          </p:cNvPicPr>
-          <p:nvPr/>
-        </p:nvPicPr>
-        <p:blipFill>
-          <a:blip r:embed="rId3"/>
-          <a:stretch>
-            <a:fillRect/>
-          </a:stretch>
-        </p:blipFill>
-        <p:spPr>
-          <a:xfrm>
-            <a:off x="4881282" y="195682"/>
-            <a:ext cx="1484555" cy="504749"/>
-          </a:xfrm>
-          <a:prstGeom prst="rect">
-            <a:avLst/>
-          </a:prstGeom>
-        </p:spPr>
-      </p:pic>
-      <p:pic>
-        <p:nvPicPr>
-          <p:cNvPr id="5" name="Image 3" descr="napoli.png">    </p:cNvPr>
-          <p:cNvPicPr>
-            <a:picLocks noChangeAspect="1"/>
-          </p:cNvPicPr>
-          <p:nvPr/>
-        </p:nvPicPr>
-        <p:blipFill>
-          <a:blip r:embed="rId4"/>
-          <a:stretch>
-            <a:fillRect/>
-          </a:stretch>
-        </p:blipFill>
-        <p:spPr>
-          <a:xfrm>
-            <a:off x="7077887" y="237744"/>
-            <a:ext cx="1297585" cy="420624"/>
-          </a:xfrm>
-          <a:prstGeom prst="rect">
-            <a:avLst/>
-          </a:prstGeom>
-        </p:spPr>
-      </p:pic>
-      <p:sp>
-        <p:nvSpPr>
-          <p:cNvPr id="6" name="Text 0"/>
-          <p:cNvSpPr/>
-          <p:nvPr/>
-        </p:nvSpPr>
-        <p:spPr>
-          <a:xfrm>
-            <a:off x="365760" y="960120"/>
-            <a:ext cx="8412480" cy="548640"/>
-          </a:xfrm>
-          <a:prstGeom prst="rect">
-            <a:avLst/>
-          </a:prstGeom>
-          <a:noFill/>
-          <a:ln/>
-        </p:spPr>
-        <p:txBody>
-          <a:bodyPr wrap="square" lIns="0" tIns="0" rIns="0" bIns="0" rtlCol="0" anchor="ctr"/>
+      <p:sp>
+        <p:nvSpPr>
+          <p:cNvPr id="2" name="Platshållare för sidfot 1">
+            <a:extLst>
+              <a:ext uri="{FF2B5EF4-FFF2-40B4-BE49-F238E27FC236}">
+                <a16:creationId xmlns:a16="http://schemas.microsoft.com/office/drawing/2014/main" id="{4DEF97BE-8B67-0521-CBEB-1AFCA1B07BDE}"/>
+              </a:ext>
+            </a:extLst>
+          </p:cNvPr>
+          <p:cNvSpPr>
+            <a:spLocks noGrp="1"/>
+          </p:cNvSpPr>
+          <p:nvPr>
+            <p:ph type="ftr" sz="quarter" idx="11"/>
+          </p:nvPr>
+        </p:nvSpPr>
+        <p:spPr/>
+        <p:txBody>
+          <a:bodyPr/>
           <a:lstStyle/>
           <a:p>
-            <a:pPr algn="l" indent="0" marL="0">
-              <a:buNone/>
-            </a:pPr>
-            <a:r>
-              <a:rPr lang="en-US" sz="2600" b="1" dirty="0">
-                <a:solidFill>
-                  <a:srgbClr val="1E3A5F"/>
-                </a:solidFill>
-                <a:latin typeface="Cambria" pitchFamily="34" charset="0"/>
-                <a:ea typeface="Cambria" pitchFamily="34" charset="-122"/>
-                <a:cs typeface="Cambria" pitchFamily="34" charset="-120"/>
-              </a:rPr>
-              <a:t>Slide title</a:t>
-            </a:r>
-            <a:endParaRPr lang="en-US" sz="2600" dirty="0"/>
-          </a:p>
-        </p:txBody>
-      </p:sp>
-      <p:sp>
-        <p:nvSpPr>
-          <p:cNvPr id="7" name="Text 1"/>
-          <p:cNvSpPr/>
-          <p:nvPr/>
-        </p:nvSpPr>
-        <p:spPr>
-          <a:xfrm>
-            <a:off x="365760" y="1691640"/>
-            <a:ext cx="8412480" cy="2651760"/>
-          </a:xfrm>
-          <a:prstGeom prst="rect">
-            <a:avLst/>
-          </a:prstGeom>
-          <a:noFill/>
-          <a:ln/>
-        </p:spPr>
-        <p:txBody>
-          <a:bodyPr wrap="square" lIns="0" tIns="0" rIns="0" bIns="0" rtlCol="0" anchor="t"/>
+            <a:endParaRPr lang="en-SE"/>
+          </a:p>
+        </p:txBody>
+      </p:sp>
+      <p:sp>
+        <p:nvSpPr>
+          <p:cNvPr id="5" name="Rubrik 4">
+            <a:extLst>
+              <a:ext uri="{FF2B5EF4-FFF2-40B4-BE49-F238E27FC236}">
+                <a16:creationId xmlns:a16="http://schemas.microsoft.com/office/drawing/2014/main" id="{6DA55BB8-9511-69EF-E121-8EEDF2F0E110}"/>
+              </a:ext>
+            </a:extLst>
+          </p:cNvPr>
+          <p:cNvSpPr>
+            <a:spLocks noGrp="1"/>
+          </p:cNvSpPr>
+          <p:nvPr>
+            <p:ph type="title"/>
+          </p:nvPr>
+        </p:nvSpPr>
+        <p:spPr/>
+        <p:txBody>
+          <a:bodyPr/>
           <a:lstStyle/>
           <a:p>
-            <a:pPr algn="l" marL="342900" indent="-342900">
-              <a:spcAft>
-                <a:spcPts val="800"/>
-              </a:spcAft>
-              <a:buSzPct val="100000"/>
-              <a:buChar char="•"/>
-            </a:pPr>
-            <a:r>
-              <a:rPr lang="en-US" sz="1600" dirty="0">
-                <a:solidFill>
-                  <a:srgbClr val="2B2B2B"/>
-                </a:solidFill>
-                <a:latin typeface="Calibri" pitchFamily="34" charset="0"/>
-                <a:ea typeface="Calibri" pitchFamily="34" charset="-122"/>
-                <a:cs typeface="Calibri" pitchFamily="34" charset="-120"/>
-              </a:rPr>
-              <a:t>Body content goes here. Use this layout for most slides.</a:t>
-            </a:r>
-            <a:endParaRPr lang="en-US" sz="1600" dirty="0"/>
-          </a:p>
-          <a:p>
-            <a:pPr algn="l" marL="342900" indent="-342900">
-              <a:spcAft>
-                <a:spcPts val="800"/>
-              </a:spcAft>
-              <a:buSzPct val="100000"/>
-              <a:buChar char="•"/>
-            </a:pPr>
-            <a:r>
-              <a:rPr lang="en-US" sz="1600" dirty="0">
-                <a:solidFill>
-                  <a:srgbClr val="2B2B2B"/>
-                </a:solidFill>
-                <a:latin typeface="Calibri" pitchFamily="34" charset="0"/>
-                <a:ea typeface="Calibri" pitchFamily="34" charset="-122"/>
-                <a:cs typeface="Calibri" pitchFamily="34" charset="-120"/>
-              </a:rPr>
-              <a:t>Each bullet is a key point. Keep lines short and crisp.</a:t>
-            </a:r>
-            <a:endParaRPr lang="en-US" sz="1600" dirty="0"/>
-          </a:p>
-          <a:p>
-            <a:pPr algn="l" lvl="1" marL="685800" indent="-342900">
-              <a:spcAft>
-                <a:spcPts val="800"/>
-              </a:spcAft>
-              <a:buSzPct val="100000"/>
-              <a:buChar char="•"/>
-            </a:pPr>
-            <a:r>
-              <a:rPr lang="en-US" sz="1600" dirty="0">
-                <a:solidFill>
-                  <a:srgbClr val="2B2B2B"/>
-                </a:solidFill>
-                <a:latin typeface="Calibri" pitchFamily="34" charset="0"/>
-                <a:ea typeface="Calibri" pitchFamily="34" charset="-122"/>
-                <a:cs typeface="Calibri" pitchFamily="34" charset="-120"/>
-              </a:rPr>
-              <a:t>Sub-points sit one level in.</a:t>
-            </a:r>
-            <a:endParaRPr lang="en-US" sz="1600" dirty="0"/>
-          </a:p>
-          <a:p>
-            <a:pPr algn="l" marL="342900" indent="-342900">
-              <a:spcAft>
-                <a:spcPts val="800"/>
-              </a:spcAft>
-              <a:buSzPct val="100000"/>
-              <a:buChar char="•"/>
-            </a:pPr>
-            <a:r>
-              <a:rPr lang="en-US" sz="1600" dirty="0">
-                <a:solidFill>
-                  <a:srgbClr val="2B2B2B"/>
-                </a:solidFill>
-                <a:latin typeface="Calibri" pitchFamily="34" charset="0"/>
-                <a:ea typeface="Calibri" pitchFamily="34" charset="-122"/>
-                <a:cs typeface="Calibri" pitchFamily="34" charset="-120"/>
-              </a:rPr>
-              <a:t>Add figures, causal graphs, or tables alongside the text.</a:t>
-            </a:r>
-            <a:endParaRPr lang="en-US" sz="1600" dirty="0"/>
-          </a:p>
-        </p:txBody>
-      </p:sp>
-      <p:sp>
-        <p:nvSpPr>
-          <p:cNvPr id="8" name="Text 2"/>
-          <p:cNvSpPr/>
-          <p:nvPr/>
-        </p:nvSpPr>
-        <p:spPr>
-          <a:xfrm>
-            <a:off x="365760" y="4736592"/>
-            <a:ext cx="3840480" cy="274320"/>
-          </a:xfrm>
-          <a:prstGeom prst="rect">
-            <a:avLst/>
-          </a:prstGeom>
-          <a:noFill/>
-          <a:ln/>
-        </p:spPr>
-        <p:txBody>
-          <a:bodyPr wrap="square" lIns="0" tIns="0" rIns="0" bIns="0" rtlCol="0" anchor="ctr"/>
+            <a:endParaRPr lang="en-SE" dirty="0"/>
+          </a:p>
+        </p:txBody>
+      </p:sp>
+      <p:sp>
+        <p:nvSpPr>
+          <p:cNvPr id="6" name="Platshållare för innehåll 5">
+            <a:extLst>
+              <a:ext uri="{FF2B5EF4-FFF2-40B4-BE49-F238E27FC236}">
+                <a16:creationId xmlns:a16="http://schemas.microsoft.com/office/drawing/2014/main" id="{DAECB2D7-21C0-5C99-C976-B5FE0F56CA7C}"/>
+              </a:ext>
+            </a:extLst>
+          </p:cNvPr>
+          <p:cNvSpPr>
+            <a:spLocks noGrp="1"/>
+          </p:cNvSpPr>
+          <p:nvPr>
+            <p:ph idx="1"/>
+          </p:nvPr>
+        </p:nvSpPr>
+        <p:spPr/>
+        <p:txBody>
+          <a:bodyPr/>
           <a:lstStyle/>
           <a:p>
-            <a:pPr algn="l" indent="0" marL="0">
-              <a:buNone/>
-            </a:pPr>
-            <a:r>
-              <a:rPr lang="en-US" sz="900" dirty="0">
-                <a:solidFill>
-                  <a:srgbClr val="7A8794"/>
-                </a:solidFill>
-                <a:latin typeface="Calibri" pitchFamily="34" charset="0"/>
-                <a:ea typeface="Calibri" pitchFamily="34" charset="-122"/>
-                <a:cs typeface="Calibri" pitchFamily="34" charset="-120"/>
-              </a:rPr>
-              <a:t>FSE 2026  ·  Montréal  ·  5–9 July 2026</a:t>
-            </a:r>
-            <a:endParaRPr lang="en-US" sz="900" dirty="0"/>
-          </a:p>
-        </p:txBody>
-      </p:sp>
-      <p:sp>
-        <p:nvSpPr>
-          <p:cNvPr id="9" name="Text 3"/>
-          <p:cNvSpPr/>
-          <p:nvPr/>
-        </p:nvSpPr>
-        <p:spPr>
-          <a:xfrm>
-            <a:off x="3200400" y="4736592"/>
-            <a:ext cx="2743200" cy="274320"/>
-          </a:xfrm>
-          <a:prstGeom prst="rect">
-            <a:avLst/>
-          </a:prstGeom>
-          <a:noFill/>
-          <a:ln/>
-        </p:spPr>
-        <p:txBody>
-          <a:bodyPr wrap="square" lIns="0" tIns="0" rIns="0" bIns="0" rtlCol="0" anchor="ctr"/>
+            <a:endParaRPr lang="en-SE" dirty="0"/>
+          </a:p>
+        </p:txBody>
+      </p:sp>
+      <p:sp>
+        <p:nvSpPr>
+          <p:cNvPr id="4" name="Platshållare för bildnummer 3">
+            <a:extLst>
+              <a:ext uri="{FF2B5EF4-FFF2-40B4-BE49-F238E27FC236}">
+                <a16:creationId xmlns:a16="http://schemas.microsoft.com/office/drawing/2014/main" id="{049EC334-F418-CC89-F4D6-7649A6BBB65A}"/>
+              </a:ext>
+            </a:extLst>
+          </p:cNvPr>
+          <p:cNvSpPr>
+            <a:spLocks noGrp="1"/>
+          </p:cNvSpPr>
+          <p:nvPr>
+            <p:ph type="sldNum" sz="quarter" idx="12"/>
+          </p:nvPr>
+        </p:nvSpPr>
+        <p:spPr/>
+        <p:txBody>
+          <a:bodyPr/>
           <a:lstStyle/>
           <a:p>
-            <a:pPr algn="ctr" indent="0" marL="0">
-              <a:buNone/>
-            </a:pPr>
-            <a:r>
-              <a:rPr lang="en-US" sz="900" dirty="0">
-                <a:solidFill>
-                  <a:srgbClr val="7A8794"/>
-                </a:solidFill>
-                <a:latin typeface="Calibri" pitchFamily="34" charset="0"/>
-                <a:ea typeface="Calibri" pitchFamily="34" charset="-122"/>
-                <a:cs typeface="Calibri" pitchFamily="34" charset="-120"/>
-              </a:rPr>
-              <a:t>Section title</a:t>
-            </a:r>
-            <a:endParaRPr lang="en-US" sz="900" dirty="0"/>
-          </a:p>
-        </p:txBody>
-      </p:sp>
-      <p:sp>
-        <p:nvSpPr>
-          <p:cNvPr id="10" name="Text 4"/>
-          <p:cNvSpPr/>
-          <p:nvPr/>
-        </p:nvSpPr>
-        <p:spPr>
-          <a:xfrm>
-            <a:off x="7863840" y="4736592"/>
-            <a:ext cx="914400" cy="274320"/>
-          </a:xfrm>
-          <a:prstGeom prst="rect">
-            <a:avLst/>
-          </a:prstGeom>
-          <a:noFill/>
-          <a:ln/>
-        </p:spPr>
-        <p:txBody>
-          <a:bodyPr wrap="square" lIns="0" tIns="0" rIns="0" bIns="0" rtlCol="0" anchor="ctr"/>
-          <a:lstStyle/>
-          <a:p>
-            <a:pPr algn="r" indent="0" marL="0">
-              <a:buNone/>
-            </a:pPr>
-            <a:r>
-              <a:rPr lang="en-US" sz="900" dirty="0">
-                <a:solidFill>
-                  <a:srgbClr val="7A8794"/>
-                </a:solidFill>
-                <a:latin typeface="Calibri" pitchFamily="34" charset="0"/>
-                <a:ea typeface="Calibri" pitchFamily="34" charset="-122"/>
-                <a:cs typeface="Calibri" pitchFamily="34" charset="-120"/>
-              </a:rPr>
+            <a:pPr algn="r"/>
+            <a:fld id="{C53FA84E-D7EA-43A2-AD8F-825F36F0800C}" type="slidenum">
+              <a:rPr lang="en-SE" smtClean="0"/>
+              <a:pPr algn="r"/>
               <a:t>3</a:t>
-            </a:r>
-            <a:endParaRPr lang="en-US" sz="900" dirty="0"/>
+            </a:fld>
+            <a:endParaRPr lang="en-SE" dirty="0"/>
           </a:p>
         </p:txBody>
       </p:sp>
     </p:spTree>
+    <p:extLst>
+      <p:ext uri="{BB962C8B-B14F-4D97-AF65-F5344CB8AC3E}">
+        <p14:creationId xmlns:p14="http://schemas.microsoft.com/office/powerpoint/2010/main" val="1438707981"/>
+      </p:ext>
+    </p:extLst>
   </p:cSld>
   <p:clrMapOvr>
     <a:masterClrMapping/>
@@ -2097,7 +2589,7 @@
 </file>
 
 <file path=ppt/theme/theme1.xml><?xml version="1.0" encoding="utf-8"?>
-<a:theme xmlns:a="http://schemas.openxmlformats.org/drawingml/2006/main" name="Office Theme">
+<a:theme xmlns:a="http://schemas.openxmlformats.org/drawingml/2006/main" name="Anpassad formgivning">
   <a:themeElements>
     <a:clrScheme name="Office">
       <a:dk1>
@@ -2107,39 +2599,39 @@
         <a:sysClr val="window" lastClr="FFFFFF"/>
       </a:lt1>
       <a:dk2>
-        <a:srgbClr val="44546A"/>
+        <a:srgbClr val="0E2841"/>
       </a:dk2>
       <a:lt2>
-        <a:srgbClr val="E7E6E6"/>
+        <a:srgbClr val="E8E8E8"/>
       </a:lt2>
       <a:accent1>
-        <a:srgbClr val="4472C4"/>
+        <a:srgbClr val="156082"/>
       </a:accent1>
       <a:accent2>
-        <a:srgbClr val="ED7D31"/>
+        <a:srgbClr val="E97132"/>
       </a:accent2>
       <a:accent3>
-        <a:srgbClr val="A5A5A5"/>
+        <a:srgbClr val="196B24"/>
       </a:accent3>
       <a:accent4>
-        <a:srgbClr val="FFC000"/>
+        <a:srgbClr val="0F9ED5"/>
       </a:accent4>
       <a:accent5>
-        <a:srgbClr val="5B9BD5"/>
+        <a:srgbClr val="A02B93"/>
       </a:accent5>
       <a:accent6>
-        <a:srgbClr val="70AD47"/>
+        <a:srgbClr val="4EA72E"/>
       </a:accent6>
       <a:hlink>
-        <a:srgbClr val="0563C1"/>
+        <a:srgbClr val="467886"/>
       </a:hlink>
       <a:folHlink>
-        <a:srgbClr val="954F72"/>
+        <a:srgbClr val="96607D"/>
       </a:folHlink>
     </a:clrScheme>
     <a:fontScheme name="Office">
       <a:majorFont>
-        <a:latin typeface="Calibri Light" panose="020F0302020204030204"/>
+        <a:latin typeface="Aptos Display" panose="02110004020202020204"/>
         <a:ea typeface=""/>
         <a:cs typeface=""/>
         <a:font script="Jpan" typeface="游ゴシック Light"/>
@@ -2191,7 +2683,7 @@
         <a:font script="Tfng" typeface="Ebrima"/>
       </a:majorFont>
       <a:minorFont>
-        <a:latin typeface="Calibri" panose="020F0502020204030204"/>
+        <a:latin typeface="Aptos" panose="02110004020202020204"/>
         <a:ea typeface=""/>
         <a:cs typeface=""/>
         <a:font script="Jpan" typeface="游ゴシック"/>
@@ -2302,13 +2794,6 @@
         </a:gradFill>
       </a:fillStyleLst>
       <a:lnStyleLst>
-        <a:ln w="6350" cap="flat" cmpd="sng" algn="ctr">
-          <a:solidFill>
-            <a:schemeClr val="phClr"/>
-          </a:solidFill>
-          <a:prstDash val="solid"/>
-          <a:miter lim="800000"/>
-        </a:ln>
         <a:ln w="12700" cap="flat" cmpd="sng" algn="ctr">
           <a:solidFill>
             <a:schemeClr val="phClr"/>
@@ -2317,6 +2802,13 @@
           <a:miter lim="800000"/>
         </a:ln>
         <a:ln w="19050" cap="flat" cmpd="sng" algn="ctr">
+          <a:solidFill>
+            <a:schemeClr val="phClr"/>
+          </a:solidFill>
+          <a:prstDash val="solid"/>
+          <a:miter lim="800000"/>
+        </a:ln>
+        <a:ln w="25400" cap="flat" cmpd="sng" algn="ctr">
           <a:solidFill>
             <a:schemeClr val="phClr"/>
           </a:solidFill>
@@ -2381,11 +2873,346 @@
       </a:bgFillStyleLst>
     </a:fmtScheme>
   </a:themeElements>
-  <a:objectDefaults/>
+  <a:objectDefaults>
+    <a:lnDef>
+      <a:spPr/>
+      <a:bodyPr/>
+      <a:lstStyle/>
+      <a:style>
+        <a:lnRef idx="2">
+          <a:schemeClr val="accent1"/>
+        </a:lnRef>
+        <a:fillRef idx="0">
+          <a:schemeClr val="accent1"/>
+        </a:fillRef>
+        <a:effectRef idx="1">
+          <a:schemeClr val="accent1"/>
+        </a:effectRef>
+        <a:fontRef idx="minor">
+          <a:schemeClr val="tx1"/>
+        </a:fontRef>
+      </a:style>
+    </a:lnDef>
+  </a:objectDefaults>
   <a:extraClrSchemeLst/>
   <a:extLst>
     <a:ext uri="{05A4C25C-085E-4340-85A3-A5531E510DB2}">
-      <thm15:themeFamily xmlns:thm15="http://schemas.microsoft.com/office/thememl/2012/main" name="Office Theme" id="{62F939B6-93AF-4DB8-9C6B-D6C7DFDC589F}" vid="{4A3C46E8-61CC-4603-A589-7422A47A8E4A}"/>
+      <thm15:themeFamily xmlns:thm15="http://schemas.microsoft.com/office/thememl/2012/main" name="Office Theme" id="{2E142A2C-CD16-42D6-873A-C26D2A0506FA}" vid="{1BDDFF52-6CD6-40A5-AB3C-68EB2F1E4D0A}"/>
+    </a:ext>
+  </a:extLst>
+</a:theme>
+</file>
+
+<file path=ppt/theme/theme2.xml><?xml version="1.0" encoding="utf-8"?>
+<a:theme xmlns:a="http://schemas.openxmlformats.org/drawingml/2006/main" name="Office-tema">
+  <a:themeElements>
+    <a:clrScheme name="Office">
+      <a:dk1>
+        <a:sysClr val="windowText" lastClr="000000"/>
+      </a:dk1>
+      <a:lt1>
+        <a:sysClr val="window" lastClr="FFFFFF"/>
+      </a:lt1>
+      <a:dk2>
+        <a:srgbClr val="0E2841"/>
+      </a:dk2>
+      <a:lt2>
+        <a:srgbClr val="E8E8E8"/>
+      </a:lt2>
+      <a:accent1>
+        <a:srgbClr val="156082"/>
+      </a:accent1>
+      <a:accent2>
+        <a:srgbClr val="E97132"/>
+      </a:accent2>
+      <a:accent3>
+        <a:srgbClr val="196B24"/>
+      </a:accent3>
+      <a:accent4>
+        <a:srgbClr val="0F9ED5"/>
+      </a:accent4>
+      <a:accent5>
+        <a:srgbClr val="A02B93"/>
+      </a:accent5>
+      <a:accent6>
+        <a:srgbClr val="4EA72E"/>
+      </a:accent6>
+      <a:hlink>
+        <a:srgbClr val="467886"/>
+      </a:hlink>
+      <a:folHlink>
+        <a:srgbClr val="96607D"/>
+      </a:folHlink>
+    </a:clrScheme>
+    <a:fontScheme name="Office">
+      <a:majorFont>
+        <a:latin typeface="Aptos Display" panose="02110004020202020204"/>
+        <a:ea typeface=""/>
+        <a:cs typeface=""/>
+        <a:font script="Jpan" typeface="游ゴシック Light"/>
+        <a:font script="Hang" typeface="맑은 고딕"/>
+        <a:font script="Hans" typeface="等线 Light"/>
+        <a:font script="Hant" typeface="新細明體"/>
+        <a:font script="Arab" typeface="Times New Roman"/>
+        <a:font script="Hebr" typeface="Times New Roman"/>
+        <a:font script="Thai" typeface="Angsana New"/>
+        <a:font script="Ethi" typeface="Nyala"/>
+        <a:font script="Beng" typeface="Vrinda"/>
+        <a:font script="Gujr" typeface="Shruti"/>
+        <a:font script="Khmr" typeface="MoolBoran"/>
+        <a:font script="Knda" typeface="Tunga"/>
+        <a:font script="Guru" typeface="Raavi"/>
+        <a:font script="Cans" typeface="Euphemia"/>
+        <a:font script="Cher" typeface="Plantagenet Cherokee"/>
+        <a:font script="Yiii" typeface="Microsoft Yi Baiti"/>
+        <a:font script="Tibt" typeface="Microsoft Himalaya"/>
+        <a:font script="Thaa" typeface="MV Boli"/>
+        <a:font script="Deva" typeface="Mangal"/>
+        <a:font script="Telu" typeface="Gautami"/>
+        <a:font script="Taml" typeface="Latha"/>
+        <a:font script="Syrc" typeface="Estrangelo Edessa"/>
+        <a:font script="Orya" typeface="Kalinga"/>
+        <a:font script="Mlym" typeface="Kartika"/>
+        <a:font script="Laoo" typeface="DokChampa"/>
+        <a:font script="Sinh" typeface="Iskoola Pota"/>
+        <a:font script="Mong" typeface="Mongolian Baiti"/>
+        <a:font script="Viet" typeface="Times New Roman"/>
+        <a:font script="Uigh" typeface="Microsoft Uighur"/>
+        <a:font script="Geor" typeface="Sylfaen"/>
+        <a:font script="Armn" typeface="Arial"/>
+        <a:font script="Bugi" typeface="Leelawadee UI"/>
+        <a:font script="Bopo" typeface="Microsoft JhengHei"/>
+        <a:font script="Java" typeface="Javanese Text"/>
+        <a:font script="Lisu" typeface="Segoe UI"/>
+        <a:font script="Mymr" typeface="Myanmar Text"/>
+        <a:font script="Nkoo" typeface="Ebrima"/>
+        <a:font script="Olck" typeface="Nirmala UI"/>
+        <a:font script="Osma" typeface="Ebrima"/>
+        <a:font script="Phag" typeface="Phagspa"/>
+        <a:font script="Syrn" typeface="Estrangelo Edessa"/>
+        <a:font script="Syrj" typeface="Estrangelo Edessa"/>
+        <a:font script="Syre" typeface="Estrangelo Edessa"/>
+        <a:font script="Sora" typeface="Nirmala UI"/>
+        <a:font script="Tale" typeface="Microsoft Tai Le"/>
+        <a:font script="Talu" typeface="Microsoft New Tai Lue"/>
+        <a:font script="Tfng" typeface="Ebrima"/>
+      </a:majorFont>
+      <a:minorFont>
+        <a:latin typeface="Aptos" panose="02110004020202020204"/>
+        <a:ea typeface=""/>
+        <a:cs typeface=""/>
+        <a:font script="Jpan" typeface="游ゴシック"/>
+        <a:font script="Hang" typeface="맑은 고딕"/>
+        <a:font script="Hans" typeface="等线"/>
+        <a:font script="Hant" typeface="新細明體"/>
+        <a:font script="Arab" typeface="Arial"/>
+        <a:font script="Hebr" typeface="Arial"/>
+        <a:font script="Thai" typeface="Cordia New"/>
+        <a:font script="Ethi" typeface="Nyala"/>
+        <a:font script="Beng" typeface="Vrinda"/>
+        <a:font script="Gujr" typeface="Shruti"/>
+        <a:font script="Khmr" typeface="DaunPenh"/>
+        <a:font script="Knda" typeface="Tunga"/>
+        <a:font script="Guru" typeface="Raavi"/>
+        <a:font script="Cans" typeface="Euphemia"/>
+        <a:font script="Cher" typeface="Plantagenet Cherokee"/>
+        <a:font script="Yiii" typeface="Microsoft Yi Baiti"/>
+        <a:font script="Tibt" typeface="Microsoft Himalaya"/>
+        <a:font script="Thaa" typeface="MV Boli"/>
+        <a:font script="Deva" typeface="Mangal"/>
+        <a:font script="Telu" typeface="Gautami"/>
+        <a:font script="Taml" typeface="Latha"/>
+        <a:font script="Syrc" typeface="Estrangelo Edessa"/>
+        <a:font script="Orya" typeface="Kalinga"/>
+        <a:font script="Mlym" typeface="Kartika"/>
+        <a:font script="Laoo" typeface="DokChampa"/>
+        <a:font script="Sinh" typeface="Iskoola Pota"/>
+        <a:font script="Mong" typeface="Mongolian Baiti"/>
+        <a:font script="Viet" typeface="Arial"/>
+        <a:font script="Uigh" typeface="Microsoft Uighur"/>
+        <a:font script="Geor" typeface="Sylfaen"/>
+        <a:font script="Armn" typeface="Arial"/>
+        <a:font script="Bugi" typeface="Leelawadee UI"/>
+        <a:font script="Bopo" typeface="Microsoft JhengHei"/>
+        <a:font script="Java" typeface="Javanese Text"/>
+        <a:font script="Lisu" typeface="Segoe UI"/>
+        <a:font script="Mymr" typeface="Myanmar Text"/>
+        <a:font script="Nkoo" typeface="Ebrima"/>
+        <a:font script="Olck" typeface="Nirmala UI"/>
+        <a:font script="Osma" typeface="Ebrima"/>
+        <a:font script="Phag" typeface="Phagspa"/>
+        <a:font script="Syrn" typeface="Estrangelo Edessa"/>
+        <a:font script="Syrj" typeface="Estrangelo Edessa"/>
+        <a:font script="Syre" typeface="Estrangelo Edessa"/>
+        <a:font script="Sora" typeface="Nirmala UI"/>
+        <a:font script="Tale" typeface="Microsoft Tai Le"/>
+        <a:font script="Talu" typeface="Microsoft New Tai Lue"/>
+        <a:font script="Tfng" typeface="Ebrima"/>
+      </a:minorFont>
+    </a:fontScheme>
+    <a:fmtScheme name="Office">
+      <a:fillStyleLst>
+        <a:solidFill>
+          <a:schemeClr val="phClr"/>
+        </a:solidFill>
+        <a:gradFill rotWithShape="1">
+          <a:gsLst>
+            <a:gs pos="0">
+              <a:schemeClr val="phClr">
+                <a:lumMod val="110000"/>
+                <a:satMod val="105000"/>
+                <a:tint val="67000"/>
+              </a:schemeClr>
+            </a:gs>
+            <a:gs pos="50000">
+              <a:schemeClr val="phClr">
+                <a:lumMod val="105000"/>
+                <a:satMod val="103000"/>
+                <a:tint val="73000"/>
+              </a:schemeClr>
+            </a:gs>
+            <a:gs pos="100000">
+              <a:schemeClr val="phClr">
+                <a:lumMod val="105000"/>
+                <a:satMod val="109000"/>
+                <a:tint val="81000"/>
+              </a:schemeClr>
+            </a:gs>
+          </a:gsLst>
+          <a:lin ang="5400000" scaled="0"/>
+        </a:gradFill>
+        <a:gradFill rotWithShape="1">
+          <a:gsLst>
+            <a:gs pos="0">
+              <a:schemeClr val="phClr">
+                <a:satMod val="103000"/>
+                <a:lumMod val="102000"/>
+                <a:tint val="94000"/>
+              </a:schemeClr>
+            </a:gs>
+            <a:gs pos="50000">
+              <a:schemeClr val="phClr">
+                <a:satMod val="110000"/>
+                <a:lumMod val="100000"/>
+                <a:shade val="100000"/>
+              </a:schemeClr>
+            </a:gs>
+            <a:gs pos="100000">
+              <a:schemeClr val="phClr">
+                <a:lumMod val="99000"/>
+                <a:satMod val="120000"/>
+                <a:shade val="78000"/>
+              </a:schemeClr>
+            </a:gs>
+          </a:gsLst>
+          <a:lin ang="5400000" scaled="0"/>
+        </a:gradFill>
+      </a:fillStyleLst>
+      <a:lnStyleLst>
+        <a:ln w="12700" cap="flat" cmpd="sng" algn="ctr">
+          <a:solidFill>
+            <a:schemeClr val="phClr"/>
+          </a:solidFill>
+          <a:prstDash val="solid"/>
+          <a:miter lim="800000"/>
+        </a:ln>
+        <a:ln w="19050" cap="flat" cmpd="sng" algn="ctr">
+          <a:solidFill>
+            <a:schemeClr val="phClr"/>
+          </a:solidFill>
+          <a:prstDash val="solid"/>
+          <a:miter lim="800000"/>
+        </a:ln>
+        <a:ln w="25400" cap="flat" cmpd="sng" algn="ctr">
+          <a:solidFill>
+            <a:schemeClr val="phClr"/>
+          </a:solidFill>
+          <a:prstDash val="solid"/>
+          <a:miter lim="800000"/>
+        </a:ln>
+      </a:lnStyleLst>
+      <a:effectStyleLst>
+        <a:effectStyle>
+          <a:effectLst/>
+        </a:effectStyle>
+        <a:effectStyle>
+          <a:effectLst/>
+        </a:effectStyle>
+        <a:effectStyle>
+          <a:effectLst>
+            <a:outerShdw blurRad="57150" dist="19050" dir="5400000" algn="ctr" rotWithShape="0">
+              <a:srgbClr val="000000">
+                <a:alpha val="63000"/>
+              </a:srgbClr>
+            </a:outerShdw>
+          </a:effectLst>
+        </a:effectStyle>
+      </a:effectStyleLst>
+      <a:bgFillStyleLst>
+        <a:solidFill>
+          <a:schemeClr val="phClr"/>
+        </a:solidFill>
+        <a:solidFill>
+          <a:schemeClr val="phClr">
+            <a:tint val="95000"/>
+            <a:satMod val="170000"/>
+          </a:schemeClr>
+        </a:solidFill>
+        <a:gradFill rotWithShape="1">
+          <a:gsLst>
+            <a:gs pos="0">
+              <a:schemeClr val="phClr">
+                <a:tint val="93000"/>
+                <a:satMod val="150000"/>
+                <a:shade val="98000"/>
+                <a:lumMod val="102000"/>
+              </a:schemeClr>
+            </a:gs>
+            <a:gs pos="50000">
+              <a:schemeClr val="phClr">
+                <a:tint val="98000"/>
+                <a:satMod val="130000"/>
+                <a:shade val="90000"/>
+                <a:lumMod val="103000"/>
+              </a:schemeClr>
+            </a:gs>
+            <a:gs pos="100000">
+              <a:schemeClr val="phClr">
+                <a:shade val="63000"/>
+                <a:satMod val="120000"/>
+              </a:schemeClr>
+            </a:gs>
+          </a:gsLst>
+          <a:lin ang="5400000" scaled="0"/>
+        </a:gradFill>
+      </a:bgFillStyleLst>
+    </a:fmtScheme>
+  </a:themeElements>
+  <a:objectDefaults>
+    <a:lnDef>
+      <a:spPr/>
+      <a:bodyPr/>
+      <a:lstStyle/>
+      <a:style>
+        <a:lnRef idx="2">
+          <a:schemeClr val="accent1"/>
+        </a:lnRef>
+        <a:fillRef idx="0">
+          <a:schemeClr val="accent1"/>
+        </a:fillRef>
+        <a:effectRef idx="1">
+          <a:schemeClr val="accent1"/>
+        </a:effectRef>
+        <a:fontRef idx="minor">
+          <a:schemeClr val="tx1"/>
+        </a:fontRef>
+      </a:style>
+    </a:lnDef>
+  </a:objectDefaults>
+  <a:extraClrSchemeLst/>
+  <a:extLst>
+    <a:ext uri="{05A4C25C-085E-4340-85A3-A5531E510DB2}">
+      <thm15:themeFamily xmlns:thm15="http://schemas.microsoft.com/office/thememl/2012/main" name="Office Theme" id="{2E142A2C-CD16-42D6-873A-C26D2A0506FA}" vid="{1BDDFF52-6CD6-40A5-AB3C-68EB2F1E4D0A}"/>
     </a:ext>
   </a:extLst>
 </a:theme>

--- a/slides/template/tutorial_template.pptx
+++ b/slides/template/tutorial_template.pptx
@@ -467,7 +467,7 @@
         </p:nvSpPr>
         <p:spPr>
           <a:xfrm>
-            <a:off x="286660" y="993423"/>
+            <a:off x="286660" y="848460"/>
             <a:ext cx="8694913" cy="541049"/>
           </a:xfrm>
           <a:prstGeom prst="rect">
@@ -506,8 +506,8 @@
         </p:nvSpPr>
         <p:spPr>
           <a:xfrm>
-            <a:off x="286660" y="1665796"/>
-            <a:ext cx="8694913" cy="2996441"/>
+            <a:off x="286660" y="1483112"/>
+            <a:ext cx="8694913" cy="3179125"/>
           </a:xfrm>
           <a:prstGeom prst="rect">
             <a:avLst/>
@@ -677,7 +677,7 @@
         </p:nvSpPr>
         <p:spPr>
           <a:xfrm>
-            <a:off x="286660" y="993423"/>
+            <a:off x="286660" y="848460"/>
             <a:ext cx="8694913" cy="541049"/>
           </a:xfrm>
           <a:prstGeom prst="rect">
@@ -793,8 +793,8 @@
         </p:nvSpPr>
         <p:spPr>
           <a:xfrm>
-            <a:off x="286660" y="1669411"/>
-            <a:ext cx="4285339" cy="2962914"/>
+            <a:off x="286660" y="1524447"/>
+            <a:ext cx="4285339" cy="3107878"/>
           </a:xfrm>
           <a:prstGeom prst="rect">
             <a:avLst/>
@@ -861,8 +861,8 @@
         </p:nvSpPr>
         <p:spPr>
           <a:xfrm>
-            <a:off x="4648199" y="1669410"/>
-            <a:ext cx="4333373" cy="2962915"/>
+            <a:off x="4648199" y="1524448"/>
+            <a:ext cx="4333373" cy="3107878"/>
           </a:xfrm>
           <a:prstGeom prst="rect">
             <a:avLst/>
@@ -954,7 +954,7 @@
         </p:nvSpPr>
         <p:spPr>
           <a:xfrm>
-            <a:off x="286660" y="993423"/>
+            <a:off x="286660" y="848460"/>
             <a:ext cx="8694913" cy="541049"/>
           </a:xfrm>
           <a:prstGeom prst="rect">
@@ -1215,7 +1215,7 @@
         </p:nvSpPr>
         <p:spPr>
           <a:xfrm>
-            <a:off x="286660" y="993423"/>
+            <a:off x="286660" y="848460"/>
             <a:ext cx="8694913" cy="541049"/>
           </a:xfrm>
           <a:prstGeom prst="rect">
